--- a/Sem 4/RDBMS/Module 4/4.1_Normalization.pptx
+++ b/Sem 4/RDBMS/Module 4/4.1_Normalization.pptx
@@ -263,7 +263,7 @@
           <a:p>
             <a:fld id="{FFFA7CE5-1940-41F2-8829-636E3081F82D}" type="datetimeFigureOut">
               <a:rPr lang="en-IN" smtClean="0"/>
-              <a:t>19-04-2025</a:t>
+              <a:t>05-05-2025</a:t>
             </a:fld>
             <a:endParaRPr lang="en-IN"/>
           </a:p>
@@ -5106,7 +5106,7 @@
           <a:p>
             <a:fld id="{8DC2F2BE-1044-4102-A9C1-3B42A02D3128}" type="datetimeFigureOut">
               <a:rPr lang="en-IN" smtClean="0"/>
-              <a:t>19-04-2025</a:t>
+              <a:t>05-05-2025</a:t>
             </a:fld>
             <a:endParaRPr lang="en-IN"/>
           </a:p>
@@ -5276,7 +5276,7 @@
           <a:p>
             <a:fld id="{8DC2F2BE-1044-4102-A9C1-3B42A02D3128}" type="datetimeFigureOut">
               <a:rPr lang="en-IN" smtClean="0"/>
-              <a:t>19-04-2025</a:t>
+              <a:t>05-05-2025</a:t>
             </a:fld>
             <a:endParaRPr lang="en-IN"/>
           </a:p>
@@ -5456,7 +5456,7 @@
           <a:p>
             <a:fld id="{8DC2F2BE-1044-4102-A9C1-3B42A02D3128}" type="datetimeFigureOut">
               <a:rPr lang="en-IN" smtClean="0"/>
-              <a:t>19-04-2025</a:t>
+              <a:t>05-05-2025</a:t>
             </a:fld>
             <a:endParaRPr lang="en-IN"/>
           </a:p>
@@ -5626,7 +5626,7 @@
           <a:p>
             <a:fld id="{8DC2F2BE-1044-4102-A9C1-3B42A02D3128}" type="datetimeFigureOut">
               <a:rPr lang="en-IN" smtClean="0"/>
-              <a:t>19-04-2025</a:t>
+              <a:t>05-05-2025</a:t>
             </a:fld>
             <a:endParaRPr lang="en-IN"/>
           </a:p>
@@ -5872,7 +5872,7 @@
           <a:p>
             <a:fld id="{8DC2F2BE-1044-4102-A9C1-3B42A02D3128}" type="datetimeFigureOut">
               <a:rPr lang="en-IN" smtClean="0"/>
-              <a:t>19-04-2025</a:t>
+              <a:t>05-05-2025</a:t>
             </a:fld>
             <a:endParaRPr lang="en-IN"/>
           </a:p>
@@ -6160,7 +6160,7 @@
           <a:p>
             <a:fld id="{8DC2F2BE-1044-4102-A9C1-3B42A02D3128}" type="datetimeFigureOut">
               <a:rPr lang="en-IN" smtClean="0"/>
-              <a:t>19-04-2025</a:t>
+              <a:t>05-05-2025</a:t>
             </a:fld>
             <a:endParaRPr lang="en-IN"/>
           </a:p>
@@ -6582,7 +6582,7 @@
           <a:p>
             <a:fld id="{8DC2F2BE-1044-4102-A9C1-3B42A02D3128}" type="datetimeFigureOut">
               <a:rPr lang="en-IN" smtClean="0"/>
-              <a:t>19-04-2025</a:t>
+              <a:t>05-05-2025</a:t>
             </a:fld>
             <a:endParaRPr lang="en-IN"/>
           </a:p>
@@ -6700,7 +6700,7 @@
           <a:p>
             <a:fld id="{8DC2F2BE-1044-4102-A9C1-3B42A02D3128}" type="datetimeFigureOut">
               <a:rPr lang="en-IN" smtClean="0"/>
-              <a:t>19-04-2025</a:t>
+              <a:t>05-05-2025</a:t>
             </a:fld>
             <a:endParaRPr lang="en-IN"/>
           </a:p>
@@ -6795,7 +6795,7 @@
           <a:p>
             <a:fld id="{8DC2F2BE-1044-4102-A9C1-3B42A02D3128}" type="datetimeFigureOut">
               <a:rPr lang="en-IN" smtClean="0"/>
-              <a:t>19-04-2025</a:t>
+              <a:t>05-05-2025</a:t>
             </a:fld>
             <a:endParaRPr lang="en-IN"/>
           </a:p>
@@ -7072,7 +7072,7 @@
           <a:p>
             <a:fld id="{8DC2F2BE-1044-4102-A9C1-3B42A02D3128}" type="datetimeFigureOut">
               <a:rPr lang="en-IN" smtClean="0"/>
-              <a:t>19-04-2025</a:t>
+              <a:t>05-05-2025</a:t>
             </a:fld>
             <a:endParaRPr lang="en-IN"/>
           </a:p>
@@ -7325,7 +7325,7 @@
           <a:p>
             <a:fld id="{8DC2F2BE-1044-4102-A9C1-3B42A02D3128}" type="datetimeFigureOut">
               <a:rPr lang="en-IN" smtClean="0"/>
-              <a:t>19-04-2025</a:t>
+              <a:t>05-05-2025</a:t>
             </a:fld>
             <a:endParaRPr lang="en-IN"/>
           </a:p>
@@ -7538,7 +7538,7 @@
           <a:p>
             <a:fld id="{8DC2F2BE-1044-4102-A9C1-3B42A02D3128}" type="datetimeFigureOut">
               <a:rPr lang="en-IN" smtClean="0"/>
-              <a:t>19-04-2025</a:t>
+              <a:t>05-05-2025</a:t>
             </a:fld>
             <a:endParaRPr lang="en-IN"/>
           </a:p>
@@ -7995,6 +7995,49 @@
           </a:extLst>
         </p:spPr>
       </p:pic>
+      <p:sp>
+        <p:nvSpPr>
+          <p:cNvPr id="3" name="TextBox 2">
+            <a:extLst>
+              <a:ext uri="{FF2B5EF4-FFF2-40B4-BE49-F238E27FC236}">
+                <a16:creationId xmlns:a16="http://schemas.microsoft.com/office/drawing/2014/main" id="{7D0F463A-9798-B68C-49FE-7B6F0EA11F77}"/>
+              </a:ext>
+            </a:extLst>
+          </p:cNvPr>
+          <p:cNvSpPr txBox="1"/>
+          <p:nvPr/>
+        </p:nvSpPr>
+        <p:spPr>
+          <a:xfrm>
+            <a:off x="683568" y="476672"/>
+            <a:ext cx="7416824" cy="923330"/>
+          </a:xfrm>
+          <a:prstGeom prst="rect">
+            <a:avLst/>
+          </a:prstGeom>
+          <a:noFill/>
+        </p:spPr>
+        <p:txBody>
+          <a:bodyPr wrap="square" rtlCol="0">
+            <a:spAutoFit/>
+          </a:bodyPr>
+          <a:lstStyle/>
+          <a:p>
+            <a:r>
+              <a:rPr lang="en-US" dirty="0"/>
+              <a:t>What is Data redundancy ?</a:t>
+            </a:r>
+            <a:br>
+              <a:rPr lang="en-US" dirty="0"/>
+            </a:br>
+            <a:r>
+              <a:rPr lang="en-US" dirty="0"/>
+              <a:t>Data redundancy is when multiple copies of the same information are stored in more than one place at a time</a:t>
+            </a:r>
+            <a:endParaRPr lang="en-IN" dirty="0"/>
+          </a:p>
+        </p:txBody>
+      </p:sp>
     </p:spTree>
     <p:extLst>
       <p:ext uri="{BB962C8B-B14F-4D97-AF65-F5344CB8AC3E}">
@@ -9254,10 +9297,13 @@
               <a:buFont typeface="Noto Sans Symbols"/>
               <a:buNone/>
             </a:pPr>
-            <a:endParaRPr sz="2800" b="0" i="0" u="none">
+            <a:endParaRPr sz="2800" b="0" i="0" u="none" dirty="0">
               <a:solidFill>
                 <a:schemeClr val="dk2"/>
               </a:solidFill>
+              <a:highlight>
+                <a:srgbClr val="FFFF00"/>
+              </a:highlight>
               <a:latin typeface="Arial"/>
               <a:ea typeface="Arial"/>
               <a:cs typeface="Arial"/>
@@ -9283,10 +9329,13 @@
               <a:buChar char="■"/>
             </a:pPr>
             <a:r>
-              <a:rPr lang="en-US" sz="2800" b="0" i="0" u="none">
+              <a:rPr lang="en-US" sz="2800" b="0" i="0" u="none" dirty="0">
                 <a:solidFill>
                   <a:schemeClr val="dk2"/>
                 </a:solidFill>
+                <a:highlight>
+                  <a:srgbClr val="FFFF00"/>
+                </a:highlight>
                 <a:latin typeface="Arial"/>
                 <a:ea typeface="Arial"/>
                 <a:cs typeface="Arial"/>
@@ -9294,7 +9343,11 @@
               </a:rPr>
               <a:t>All the attributes must have atomic values </a:t>
             </a:r>
-            <a:endParaRPr/>
+            <a:endParaRPr dirty="0">
+              <a:highlight>
+                <a:srgbClr val="FFFF00"/>
+              </a:highlight>
+            </a:endParaRPr>
           </a:p>
           <a:p>
             <a:pPr marL="342900" lvl="0" indent="-342900" algn="l" rtl="0">
@@ -9315,10 +9368,13 @@
               <a:buChar char="■"/>
             </a:pPr>
             <a:r>
-              <a:rPr lang="en-US" sz="2800" b="0" i="0" u="none">
+              <a:rPr lang="en-US" sz="2800" b="0" i="0" u="none" dirty="0">
                 <a:solidFill>
                   <a:schemeClr val="dk2"/>
                 </a:solidFill>
+                <a:highlight>
+                  <a:srgbClr val="FFFF00"/>
+                </a:highlight>
                 <a:latin typeface="Arial"/>
                 <a:ea typeface="Arial"/>
                 <a:cs typeface="Arial"/>
@@ -9326,7 +9382,11 @@
               </a:rPr>
               <a:t>Disallows</a:t>
             </a:r>
-            <a:endParaRPr/>
+            <a:endParaRPr dirty="0">
+              <a:highlight>
+                <a:srgbClr val="FFFF00"/>
+              </a:highlight>
+            </a:endParaRPr>
           </a:p>
           <a:p>
             <a:pPr marL="742950" lvl="1" indent="-285750" algn="l" rtl="0">
@@ -9347,10 +9407,13 @@
               <a:buChar char="■"/>
             </a:pPr>
             <a:r>
-              <a:rPr lang="en-US" sz="2600" b="0" i="0" u="none">
+              <a:rPr lang="en-US" sz="2600" b="0" i="0" u="none" dirty="0">
                 <a:solidFill>
                   <a:srgbClr val="800000"/>
                 </a:solidFill>
+                <a:highlight>
+                  <a:srgbClr val="FFFF00"/>
+                </a:highlight>
                 <a:latin typeface="Arial"/>
                 <a:ea typeface="Arial"/>
                 <a:cs typeface="Arial"/>
@@ -9358,7 +9421,11 @@
               </a:rPr>
               <a:t>composite attributes</a:t>
             </a:r>
-            <a:endParaRPr/>
+            <a:endParaRPr dirty="0">
+              <a:highlight>
+                <a:srgbClr val="FFFF00"/>
+              </a:highlight>
+            </a:endParaRPr>
           </a:p>
           <a:p>
             <a:pPr marL="742950" lvl="1" indent="-285750" algn="l" rtl="0">
@@ -9379,10 +9446,13 @@
               <a:buChar char="■"/>
             </a:pPr>
             <a:r>
-              <a:rPr lang="en-US" sz="2600" b="0" i="0" u="none">
+              <a:rPr lang="en-US" sz="2600" b="0" i="0" u="none" dirty="0">
                 <a:solidFill>
                   <a:srgbClr val="800000"/>
                 </a:solidFill>
+                <a:highlight>
+                  <a:srgbClr val="FFFF00"/>
+                </a:highlight>
                 <a:latin typeface="Arial"/>
                 <a:ea typeface="Arial"/>
                 <a:cs typeface="Arial"/>
@@ -9390,7 +9460,11 @@
               </a:rPr>
               <a:t>multivalued attributes</a:t>
             </a:r>
-            <a:endParaRPr/>
+            <a:endParaRPr dirty="0">
+              <a:highlight>
+                <a:srgbClr val="FFFF00"/>
+              </a:highlight>
+            </a:endParaRPr>
           </a:p>
           <a:p>
             <a:pPr marL="742950" lvl="1" indent="-285750" algn="l" rtl="0">
@@ -9411,10 +9485,13 @@
               <a:buChar char="■"/>
             </a:pPr>
             <a:r>
-              <a:rPr lang="en-US" sz="2600" b="1" i="0" u="none">
+              <a:rPr lang="en-US" sz="2600" b="1" i="0" u="none" dirty="0">
                 <a:solidFill>
                   <a:srgbClr val="800000"/>
                 </a:solidFill>
+                <a:highlight>
+                  <a:srgbClr val="FFFF00"/>
+                </a:highlight>
                 <a:latin typeface="Arial"/>
                 <a:ea typeface="Arial"/>
                 <a:cs typeface="Arial"/>
@@ -9423,10 +9500,13 @@
               <a:t>nested relations</a:t>
             </a:r>
             <a:r>
-              <a:rPr lang="en-US" sz="2600" b="0" i="0" u="none">
+              <a:rPr lang="en-US" sz="2600" b="0" i="0" u="none" dirty="0">
                 <a:solidFill>
                   <a:srgbClr val="800000"/>
                 </a:solidFill>
+                <a:highlight>
+                  <a:srgbClr val="FFFF00"/>
+                </a:highlight>
                 <a:latin typeface="Arial"/>
                 <a:ea typeface="Arial"/>
                 <a:cs typeface="Arial"/>
@@ -9435,10 +9515,13 @@
               <a:t>; attributes whose values for an </a:t>
             </a:r>
             <a:r>
-              <a:rPr lang="en-US" sz="2600" b="0" i="1" u="none">
+              <a:rPr lang="en-US" sz="2600" b="0" i="1" u="none" dirty="0">
                 <a:solidFill>
                   <a:srgbClr val="800000"/>
                 </a:solidFill>
+                <a:highlight>
+                  <a:srgbClr val="FFFF00"/>
+                </a:highlight>
                 <a:latin typeface="Arial"/>
                 <a:ea typeface="Arial"/>
                 <a:cs typeface="Arial"/>
@@ -9447,10 +9530,13 @@
               <a:t>individual tuple</a:t>
             </a:r>
             <a:r>
-              <a:rPr lang="en-US" sz="2600" b="0" i="0" u="none">
+              <a:rPr lang="en-US" sz="2600" b="0" i="0" u="none" dirty="0">
                 <a:solidFill>
                   <a:srgbClr val="800000"/>
                 </a:solidFill>
+                <a:highlight>
+                  <a:srgbClr val="FFFF00"/>
+                </a:highlight>
                 <a:latin typeface="Arial"/>
                 <a:ea typeface="Arial"/>
                 <a:cs typeface="Arial"/>
@@ -9458,7 +9544,11 @@
               </a:rPr>
               <a:t> are non-atomic</a:t>
             </a:r>
-            <a:endParaRPr/>
+            <a:endParaRPr dirty="0">
+              <a:highlight>
+                <a:srgbClr val="FFFF00"/>
+              </a:highlight>
+            </a:endParaRPr>
           </a:p>
           <a:p>
             <a:pPr marL="342900" lvl="0" indent="-236220" algn="l" rtl="0">
@@ -9478,10 +9568,13 @@
               <a:buFont typeface="Noto Sans Symbols"/>
               <a:buNone/>
             </a:pPr>
-            <a:endParaRPr sz="2800" b="0" i="0" u="none">
+            <a:endParaRPr sz="2800" b="0" i="0" u="none" dirty="0">
               <a:solidFill>
                 <a:schemeClr val="dk2"/>
               </a:solidFill>
+              <a:highlight>
+                <a:srgbClr val="FFFF00"/>
+              </a:highlight>
               <a:latin typeface="Arial"/>
               <a:ea typeface="Arial"/>
               <a:cs typeface="Arial"/>
@@ -9502,15 +9595,54 @@
               <a:buSzPts val="1680"/>
               <a:buNone/>
             </a:pPr>
-            <a:endParaRPr sz="2800" b="0" i="0" u="none">
+            <a:endParaRPr sz="2800" b="0" i="0" u="none" dirty="0">
               <a:solidFill>
                 <a:schemeClr val="dk2"/>
               </a:solidFill>
+              <a:highlight>
+                <a:srgbClr val="FFFF00"/>
+              </a:highlight>
               <a:latin typeface="Arial"/>
               <a:ea typeface="Arial"/>
               <a:cs typeface="Arial"/>
               <a:sym typeface="Arial"/>
             </a:endParaRPr>
+          </a:p>
+        </p:txBody>
+      </p:sp>
+      <p:sp>
+        <p:nvSpPr>
+          <p:cNvPr id="2" name="TextBox 1">
+            <a:extLst>
+              <a:ext uri="{FF2B5EF4-FFF2-40B4-BE49-F238E27FC236}">
+                <a16:creationId xmlns:a16="http://schemas.microsoft.com/office/drawing/2014/main" id="{E7C86DF3-F789-A1B8-2654-829533E0BAE4}"/>
+              </a:ext>
+            </a:extLst>
+          </p:cNvPr>
+          <p:cNvSpPr txBox="1"/>
+          <p:nvPr/>
+        </p:nvSpPr>
+        <p:spPr>
+          <a:xfrm>
+            <a:off x="3981872" y="1523999"/>
+            <a:ext cx="2952328" cy="369332"/>
+          </a:xfrm>
+          <a:prstGeom prst="rect">
+            <a:avLst/>
+          </a:prstGeom>
+          <a:noFill/>
+        </p:spPr>
+        <p:txBody>
+          <a:bodyPr wrap="square" rtlCol="0">
+            <a:spAutoFit/>
+          </a:bodyPr>
+          <a:lstStyle/>
+          <a:p>
+            <a:r>
+              <a:rPr lang="en-US" dirty="0"/>
+              <a:t>Atomic means only one value</a:t>
+            </a:r>
+            <a:endParaRPr lang="en-IN" dirty="0"/>
           </a:p>
         </p:txBody>
       </p:sp>
@@ -12459,6 +12591,9 @@
                 <a:solidFill>
                   <a:schemeClr val="dk2"/>
                 </a:solidFill>
+                <a:highlight>
+                  <a:srgbClr val="FFFF00"/>
+                </a:highlight>
                 <a:latin typeface="Arial"/>
                 <a:ea typeface="Arial"/>
                 <a:cs typeface="Arial"/>
@@ -12471,6 +12606,9 @@
                 <a:solidFill>
                   <a:schemeClr val="dk2"/>
                 </a:solidFill>
+                <a:highlight>
+                  <a:srgbClr val="FFFF00"/>
+                </a:highlight>
                 <a:latin typeface="Arial"/>
                 <a:ea typeface="Arial"/>
                 <a:cs typeface="Arial"/>
@@ -12478,7 +12616,11 @@
               </a:rPr>
               <a:t>FDs, primary key</a:t>
             </a:r>
-            <a:endParaRPr dirty="0"/>
+            <a:endParaRPr dirty="0">
+              <a:highlight>
+                <a:srgbClr val="FFFF00"/>
+              </a:highlight>
+            </a:endParaRPr>
           </a:p>
           <a:p>
             <a:pPr marL="342900" lvl="0" indent="-342900" algn="l" rtl="0">
@@ -12503,6 +12645,9 @@
                 <a:solidFill>
                   <a:schemeClr val="dk2"/>
                 </a:solidFill>
+                <a:highlight>
+                  <a:srgbClr val="FFFF00"/>
+                </a:highlight>
                 <a:latin typeface="Arial"/>
                 <a:ea typeface="Arial"/>
                 <a:cs typeface="Arial"/>
@@ -12510,7 +12655,11 @@
               </a:rPr>
               <a:t>Definitions</a:t>
             </a:r>
-            <a:endParaRPr dirty="0"/>
+            <a:endParaRPr dirty="0">
+              <a:highlight>
+                <a:srgbClr val="FFFF00"/>
+              </a:highlight>
+            </a:endParaRPr>
           </a:p>
           <a:p>
             <a:pPr marL="742950" lvl="1" indent="-285750" algn="l" rtl="0">
@@ -12535,6 +12684,9 @@
                 <a:solidFill>
                   <a:srgbClr val="800000"/>
                 </a:solidFill>
+                <a:highlight>
+                  <a:srgbClr val="FFFF00"/>
+                </a:highlight>
                 <a:latin typeface="Arial"/>
                 <a:ea typeface="Arial"/>
                 <a:cs typeface="Arial"/>
@@ -12547,6 +12699,9 @@
                 <a:solidFill>
                   <a:srgbClr val="800000"/>
                 </a:solidFill>
+                <a:highlight>
+                  <a:srgbClr val="FFFF00"/>
+                </a:highlight>
                 <a:latin typeface="Arial"/>
                 <a:ea typeface="Arial"/>
                 <a:cs typeface="Arial"/>
@@ -12554,7 +12709,11 @@
               </a:rPr>
               <a:t> An attribute that is member of the candidate key K</a:t>
             </a:r>
-            <a:endParaRPr dirty="0"/>
+            <a:endParaRPr dirty="0">
+              <a:highlight>
+                <a:srgbClr val="FFFF00"/>
+              </a:highlight>
+            </a:endParaRPr>
           </a:p>
           <a:p>
             <a:pPr marL="742950" lvl="1" indent="-285750" algn="l" rtl="0">
@@ -12579,6 +12738,9 @@
                 <a:solidFill>
                   <a:srgbClr val="800000"/>
                 </a:solidFill>
+                <a:highlight>
+                  <a:srgbClr val="FFFF00"/>
+                </a:highlight>
                 <a:latin typeface="Arial"/>
                 <a:ea typeface="Arial"/>
                 <a:cs typeface="Arial"/>
@@ -12591,6 +12753,9 @@
                 <a:solidFill>
                   <a:srgbClr val="800000"/>
                 </a:solidFill>
+                <a:highlight>
+                  <a:srgbClr val="FFFF00"/>
+                </a:highlight>
                 <a:latin typeface="Arial"/>
                 <a:ea typeface="Arial"/>
                 <a:cs typeface="Arial"/>
@@ -12599,7 +12764,11 @@
               <a:t> a FD  X -&gt; Y where removal of any attribute from </a:t>
             </a:r>
             <a:r>
-              <a:rPr lang="en-US" sz="2200" dirty="0"/>
+              <a:rPr lang="en-US" sz="2200" dirty="0">
+                <a:highlight>
+                  <a:srgbClr val="FFFF00"/>
+                </a:highlight>
+              </a:rPr>
               <a:t>X</a:t>
             </a:r>
             <a:r>
@@ -12607,6 +12776,9 @@
                 <a:solidFill>
                   <a:srgbClr val="800000"/>
                 </a:solidFill>
+                <a:highlight>
+                  <a:srgbClr val="FFFF00"/>
+                </a:highlight>
                 <a:latin typeface="Arial"/>
                 <a:ea typeface="Arial"/>
                 <a:cs typeface="Arial"/>
@@ -12614,7 +12786,11 @@
               </a:rPr>
               <a:t> means the FD does not hold any more</a:t>
             </a:r>
-            <a:endParaRPr dirty="0"/>
+            <a:endParaRPr dirty="0">
+              <a:highlight>
+                <a:srgbClr val="FFFF00"/>
+              </a:highlight>
+            </a:endParaRPr>
           </a:p>
           <a:p>
             <a:pPr marL="342900" lvl="0" indent="-342900" algn="l" rtl="0">
@@ -12935,6 +13111,9 @@
                 <a:solidFill>
                   <a:schemeClr val="dk2"/>
                 </a:solidFill>
+                <a:highlight>
+                  <a:srgbClr val="FFFF00"/>
+                </a:highlight>
                 <a:latin typeface="Arial"/>
                 <a:ea typeface="Arial"/>
                 <a:cs typeface="Arial"/>
@@ -12965,6 +13144,9 @@
               <a:solidFill>
                 <a:schemeClr val="dk2"/>
               </a:solidFill>
+              <a:highlight>
+                <a:srgbClr val="FFFF00"/>
+              </a:highlight>
               <a:latin typeface="Arial"/>
               <a:ea typeface="Arial"/>
               <a:cs typeface="Arial"/>
@@ -12994,6 +13176,9 @@
                 <a:solidFill>
                   <a:schemeClr val="dk2"/>
                 </a:solidFill>
+                <a:highlight>
+                  <a:srgbClr val="FFFF00"/>
+                </a:highlight>
                 <a:latin typeface="Arial"/>
                 <a:ea typeface="Arial"/>
                 <a:cs typeface="Arial"/>
@@ -13006,6 +13191,9 @@
                 <a:solidFill>
                   <a:schemeClr val="dk2"/>
                 </a:solidFill>
+                <a:highlight>
+                  <a:srgbClr val="FFFF00"/>
+                </a:highlight>
                 <a:latin typeface="Arial"/>
                 <a:ea typeface="Arial"/>
                 <a:cs typeface="Arial"/>
@@ -13018,6 +13206,9 @@
                 <a:solidFill>
                   <a:schemeClr val="dk2"/>
                 </a:solidFill>
+                <a:highlight>
+                  <a:srgbClr val="FFFF00"/>
+                </a:highlight>
                 <a:latin typeface="Arial"/>
                 <a:ea typeface="Arial"/>
                 <a:cs typeface="Arial"/>
@@ -13025,7 +13216,11 @@
               </a:rPr>
               <a:t> if every non-prime attribute A in R is fully functionally dependent on the primary key</a:t>
             </a:r>
-            <a:endParaRPr dirty="0"/>
+            <a:endParaRPr dirty="0">
+              <a:highlight>
+                <a:srgbClr val="FFFF00"/>
+              </a:highlight>
+            </a:endParaRPr>
           </a:p>
           <a:p>
             <a:pPr marL="342900" lvl="0" indent="-236220" algn="l" rtl="0">
@@ -13049,6 +13244,9 @@
               <a:solidFill>
                 <a:schemeClr val="dk2"/>
               </a:solidFill>
+              <a:highlight>
+                <a:srgbClr val="FFFF00"/>
+              </a:highlight>
               <a:latin typeface="Arial"/>
               <a:ea typeface="Arial"/>
               <a:cs typeface="Arial"/>
@@ -13078,6 +13276,9 @@
                 <a:solidFill>
                   <a:schemeClr val="dk2"/>
                 </a:solidFill>
+                <a:highlight>
+                  <a:srgbClr val="FFFF00"/>
+                </a:highlight>
                 <a:latin typeface="Arial"/>
                 <a:ea typeface="Arial"/>
                 <a:cs typeface="Arial"/>
@@ -13085,7 +13286,11 @@
               </a:rPr>
               <a:t>R can be decomposed into 2NF relations via the process of 2NF normalization .</a:t>
             </a:r>
-            <a:endParaRPr dirty="0"/>
+            <a:endParaRPr dirty="0">
+              <a:highlight>
+                <a:srgbClr val="FFFF00"/>
+              </a:highlight>
+            </a:endParaRPr>
           </a:p>
         </p:txBody>
       </p:sp>
@@ -17559,10 +17764,13 @@
               <a:buChar char="■"/>
             </a:pPr>
             <a:r>
-              <a:rPr lang="en-US" sz="2800" b="0" i="0" u="none">
+              <a:rPr lang="en-US" sz="2800" b="0" i="0" u="none" dirty="0">
                 <a:solidFill>
                   <a:schemeClr val="dk2"/>
                 </a:solidFill>
+                <a:highlight>
+                  <a:srgbClr val="FFFF00"/>
+                </a:highlight>
                 <a:latin typeface="Arial"/>
                 <a:ea typeface="Arial"/>
                 <a:cs typeface="Arial"/>
@@ -17570,7 +17778,11 @@
               </a:rPr>
               <a:t>Definition:</a:t>
             </a:r>
-            <a:endParaRPr/>
+            <a:endParaRPr dirty="0">
+              <a:highlight>
+                <a:srgbClr val="FFFF00"/>
+              </a:highlight>
+            </a:endParaRPr>
           </a:p>
           <a:p>
             <a:pPr marL="742950" lvl="1" indent="-285750" algn="l" rtl="0">
@@ -17591,10 +17803,13 @@
               <a:buChar char="■"/>
             </a:pPr>
             <a:r>
-              <a:rPr lang="en-US" sz="2600" b="1" i="0" u="none">
+              <a:rPr lang="en-US" sz="2600" b="1" i="0" u="none" dirty="0">
                 <a:solidFill>
                   <a:srgbClr val="800000"/>
                 </a:solidFill>
+                <a:highlight>
+                  <a:srgbClr val="FFFF00"/>
+                </a:highlight>
                 <a:latin typeface="Arial"/>
                 <a:ea typeface="Arial"/>
                 <a:cs typeface="Arial"/>
@@ -17603,10 +17818,13 @@
               <a:t>Transitive functional dependency:</a:t>
             </a:r>
             <a:r>
-              <a:rPr lang="en-US" sz="2600" b="0" i="0" u="none">
+              <a:rPr lang="en-US" sz="2600" b="0" i="0" u="none" dirty="0">
                 <a:solidFill>
                   <a:srgbClr val="800000"/>
                 </a:solidFill>
+                <a:highlight>
+                  <a:srgbClr val="FFFF00"/>
+                </a:highlight>
                 <a:latin typeface="Arial"/>
                 <a:ea typeface="Arial"/>
                 <a:cs typeface="Arial"/>
@@ -17614,7 +17832,11 @@
               </a:rPr>
               <a:t> a FD  X -&gt; Z that can be derived from two FDs   X -&gt; Y and Y -&gt; Z </a:t>
             </a:r>
-            <a:endParaRPr/>
+            <a:endParaRPr dirty="0">
+              <a:highlight>
+                <a:srgbClr val="FFFF00"/>
+              </a:highlight>
+            </a:endParaRPr>
           </a:p>
           <a:p>
             <a:pPr marL="342900" lvl="0" indent="-342900" algn="l" rtl="0">
@@ -17635,10 +17857,13 @@
               <a:buChar char="■"/>
             </a:pPr>
             <a:r>
-              <a:rPr lang="en-US" sz="2800" b="0" i="0" u="none">
+              <a:rPr lang="en-US" sz="2800" b="0" i="0" u="none" dirty="0">
                 <a:solidFill>
                   <a:schemeClr val="dk2"/>
                 </a:solidFill>
+                <a:highlight>
+                  <a:srgbClr val="FFFF00"/>
+                </a:highlight>
                 <a:latin typeface="Arial"/>
                 <a:ea typeface="Arial"/>
                 <a:cs typeface="Arial"/>
@@ -17646,7 +17871,11 @@
               </a:rPr>
               <a:t>Examples:</a:t>
             </a:r>
-            <a:endParaRPr/>
+            <a:endParaRPr dirty="0">
+              <a:highlight>
+                <a:srgbClr val="FFFF00"/>
+              </a:highlight>
+            </a:endParaRPr>
           </a:p>
           <a:p>
             <a:pPr marL="742950" lvl="1" indent="-285750" algn="l" rtl="0">
@@ -17667,10 +17896,13 @@
               <a:buChar char="■"/>
             </a:pPr>
             <a:r>
-              <a:rPr lang="en-US" sz="2600" b="0" i="0" u="none">
+              <a:rPr lang="en-US" sz="2600" b="0" i="0" u="none" dirty="0">
                 <a:solidFill>
                   <a:srgbClr val="800000"/>
                 </a:solidFill>
+                <a:highlight>
+                  <a:srgbClr val="FFFF00"/>
+                </a:highlight>
                 <a:latin typeface="Arial"/>
                 <a:ea typeface="Arial"/>
                 <a:cs typeface="Arial"/>
@@ -17679,10 +17911,13 @@
               <a:t>SSN -&gt; DMGRSSN is a </a:t>
             </a:r>
             <a:r>
-              <a:rPr lang="en-US" sz="2600" b="1" i="0" u="none">
+              <a:rPr lang="en-US" sz="2600" b="1" i="0" u="none" dirty="0">
                 <a:solidFill>
                   <a:srgbClr val="800000"/>
                 </a:solidFill>
+                <a:highlight>
+                  <a:srgbClr val="FFFF00"/>
+                </a:highlight>
                 <a:latin typeface="Arial"/>
                 <a:ea typeface="Arial"/>
                 <a:cs typeface="Arial"/>
@@ -17691,10 +17926,13 @@
               <a:t>transitive</a:t>
             </a:r>
             <a:r>
-              <a:rPr lang="en-US" sz="2600" b="0" i="0" u="none">
+              <a:rPr lang="en-US" sz="2600" b="0" i="0" u="none" dirty="0">
                 <a:solidFill>
                   <a:srgbClr val="800000"/>
                 </a:solidFill>
+                <a:highlight>
+                  <a:srgbClr val="FFFF00"/>
+                </a:highlight>
                 <a:latin typeface="Arial"/>
                 <a:ea typeface="Arial"/>
                 <a:cs typeface="Arial"/>
@@ -17702,7 +17940,11 @@
               </a:rPr>
               <a:t> FD </a:t>
             </a:r>
-            <a:endParaRPr/>
+            <a:endParaRPr dirty="0">
+              <a:highlight>
+                <a:srgbClr val="FFFF00"/>
+              </a:highlight>
+            </a:endParaRPr>
           </a:p>
           <a:p>
             <a:pPr marL="1143000" lvl="2" indent="-228600" algn="l" rtl="0">
@@ -17723,10 +17965,13 @@
               <a:buChar char="■"/>
             </a:pPr>
             <a:r>
-              <a:rPr lang="en-US" sz="2400" b="0" i="0" u="none">
+              <a:rPr lang="en-US" sz="2400" b="0" i="0" u="none" dirty="0">
                 <a:solidFill>
                   <a:schemeClr val="dk2"/>
                 </a:solidFill>
+                <a:highlight>
+                  <a:srgbClr val="FFFF00"/>
+                </a:highlight>
                 <a:latin typeface="Arial"/>
                 <a:ea typeface="Arial"/>
                 <a:cs typeface="Arial"/>
@@ -17734,7 +17979,11 @@
               </a:rPr>
               <a:t>Since SSN -&gt; DNUMBER and DNUMBER -&gt; DMGRSSN hold </a:t>
             </a:r>
-            <a:endParaRPr/>
+            <a:endParaRPr dirty="0">
+              <a:highlight>
+                <a:srgbClr val="FFFF00"/>
+              </a:highlight>
+            </a:endParaRPr>
           </a:p>
           <a:p>
             <a:pPr marL="742950" lvl="1" indent="-285750" algn="l" rtl="0">
@@ -17755,10 +18004,13 @@
               <a:buChar char="■"/>
             </a:pPr>
             <a:r>
-              <a:rPr lang="en-US" sz="2600" b="0" i="0" u="none">
+              <a:rPr lang="en-US" sz="2600" b="0" i="0" u="none" dirty="0">
                 <a:solidFill>
                   <a:srgbClr val="800000"/>
                 </a:solidFill>
+                <a:highlight>
+                  <a:srgbClr val="FFFF00"/>
+                </a:highlight>
                 <a:latin typeface="Arial"/>
                 <a:ea typeface="Arial"/>
                 <a:cs typeface="Arial"/>
@@ -17767,10 +18019,13 @@
               <a:t>SSN -&gt; ENAME is </a:t>
             </a:r>
             <a:r>
-              <a:rPr lang="en-US" sz="2600" b="1" i="0" u="none">
+              <a:rPr lang="en-US" sz="2600" b="1" i="0" u="none" dirty="0">
                 <a:solidFill>
                   <a:srgbClr val="800000"/>
                 </a:solidFill>
+                <a:highlight>
+                  <a:srgbClr val="FFFF00"/>
+                </a:highlight>
                 <a:latin typeface="Arial"/>
                 <a:ea typeface="Arial"/>
                 <a:cs typeface="Arial"/>
@@ -17778,7 +18033,11 @@
               </a:rPr>
               <a:t>non-transitive</a:t>
             </a:r>
-            <a:endParaRPr/>
+            <a:endParaRPr dirty="0">
+              <a:highlight>
+                <a:srgbClr val="FFFF00"/>
+              </a:highlight>
+            </a:endParaRPr>
           </a:p>
           <a:p>
             <a:pPr marL="1143000" lvl="2" indent="-228600" algn="l" rtl="0">
@@ -17799,10 +18058,13 @@
               <a:buChar char="■"/>
             </a:pPr>
             <a:r>
-              <a:rPr lang="en-US" sz="2400" b="0" i="0" u="none">
+              <a:rPr lang="en-US" sz="2400" b="0" i="0" u="none" dirty="0">
                 <a:solidFill>
                   <a:schemeClr val="dk2"/>
                 </a:solidFill>
+                <a:highlight>
+                  <a:srgbClr val="FFFF00"/>
+                </a:highlight>
                 <a:latin typeface="Arial"/>
                 <a:ea typeface="Arial"/>
                 <a:cs typeface="Arial"/>
@@ -17810,7 +18072,11 @@
               </a:rPr>
               <a:t>Since there is no set of attributes X where SSN -&gt; X and X -&gt; ENAME </a:t>
             </a:r>
-            <a:endParaRPr/>
+            <a:endParaRPr dirty="0">
+              <a:highlight>
+                <a:srgbClr val="FFFF00"/>
+              </a:highlight>
+            </a:endParaRPr>
           </a:p>
         </p:txBody>
       </p:sp>
@@ -18035,6 +18301,9 @@
                 <a:solidFill>
                   <a:schemeClr val="dk2"/>
                 </a:solidFill>
+                <a:highlight>
+                  <a:srgbClr val="FFFF00"/>
+                </a:highlight>
                 <a:latin typeface="Arial"/>
                 <a:ea typeface="Arial"/>
                 <a:cs typeface="Arial"/>
@@ -18047,6 +18316,9 @@
                 <a:solidFill>
                   <a:schemeClr val="dk2"/>
                 </a:solidFill>
+                <a:highlight>
+                  <a:srgbClr val="FFFF00"/>
+                </a:highlight>
                 <a:latin typeface="Arial"/>
                 <a:ea typeface="Arial"/>
                 <a:cs typeface="Arial"/>
@@ -18059,6 +18331,9 @@
                 <a:solidFill>
                   <a:schemeClr val="dk2"/>
                 </a:solidFill>
+                <a:highlight>
+                  <a:srgbClr val="FFFF00"/>
+                </a:highlight>
                 <a:latin typeface="Arial"/>
                 <a:ea typeface="Arial"/>
                 <a:cs typeface="Arial"/>
@@ -18071,6 +18346,9 @@
                 <a:solidFill>
                   <a:schemeClr val="dk2"/>
                 </a:solidFill>
+                <a:highlight>
+                  <a:srgbClr val="FFFF00"/>
+                </a:highlight>
                 <a:latin typeface="Arial"/>
                 <a:ea typeface="Arial"/>
                 <a:cs typeface="Arial"/>
@@ -18083,6 +18361,9 @@
                 <a:solidFill>
                   <a:schemeClr val="dk2"/>
                 </a:solidFill>
+                <a:highlight>
+                  <a:srgbClr val="FFFF00"/>
+                </a:highlight>
                 <a:latin typeface="Arial"/>
                 <a:ea typeface="Arial"/>
                 <a:cs typeface="Arial"/>
@@ -18107,19 +18388,35 @@
               <a:buChar char="■"/>
             </a:pPr>
             <a:r>
-              <a:rPr lang="en-US" dirty="0"/>
+              <a:rPr lang="en-US" dirty="0">
+                <a:highlight>
+                  <a:srgbClr val="FFFF00"/>
+                </a:highlight>
+              </a:rPr>
               <a:t>A </a:t>
             </a:r>
             <a:r>
-              <a:rPr lang="en-US" b="1" dirty="0"/>
+              <a:rPr lang="en-US" b="1" dirty="0">
+                <a:highlight>
+                  <a:srgbClr val="FFFF00"/>
+                </a:highlight>
+              </a:rPr>
               <a:t>non-prime attribute </a:t>
             </a:r>
             <a:r>
-              <a:rPr lang="en-US" dirty="0"/>
+              <a:rPr lang="en-US" dirty="0">
+                <a:highlight>
+                  <a:srgbClr val="FFFF00"/>
+                </a:highlight>
+              </a:rPr>
               <a:t>(a column that is not a part of any candidate key) should not be dependent on </a:t>
             </a:r>
             <a:r>
-              <a:rPr lang="en-US" b="1" dirty="0"/>
+              <a:rPr lang="en-US" b="1" dirty="0">
+                <a:highlight>
+                  <a:srgbClr val="FFFF00"/>
+                </a:highlight>
+              </a:rPr>
               <a:t>another non-prime attribute.</a:t>
             </a:r>
           </a:p>
@@ -18138,7 +18435,11 @@
               <a:buFont typeface="Noto Sans Symbols"/>
               <a:buChar char="■"/>
             </a:pPr>
-            <a:endParaRPr lang="en-US" dirty="0"/>
+            <a:endParaRPr lang="en-US" dirty="0">
+              <a:highlight>
+                <a:srgbClr val="FFFF00"/>
+              </a:highlight>
+            </a:endParaRPr>
           </a:p>
           <a:p>
             <a:pPr lvl="1">
@@ -18156,10 +18457,18 @@
               <a:buChar char="■"/>
             </a:pPr>
             <a:r>
-              <a:rPr lang="en-US" dirty="0"/>
+              <a:rPr lang="en-US" dirty="0">
+                <a:highlight>
+                  <a:srgbClr val="FFFF00"/>
+                </a:highlight>
+              </a:rPr>
               <a:t>A non-prime attribute should depend only on the primary key.</a:t>
             </a:r>
-            <a:endParaRPr dirty="0"/>
+            <a:endParaRPr dirty="0">
+              <a:highlight>
+                <a:srgbClr val="FFFF00"/>
+              </a:highlight>
+            </a:endParaRPr>
           </a:p>
           <a:p>
             <a:pPr marL="342900" lvl="0" indent="-342900" algn="l" rtl="0">
@@ -18184,6 +18493,9 @@
                 <a:solidFill>
                   <a:schemeClr val="dk2"/>
                 </a:solidFill>
+                <a:highlight>
+                  <a:srgbClr val="FFFF00"/>
+                </a:highlight>
                 <a:latin typeface="Arial"/>
                 <a:ea typeface="Arial"/>
                 <a:cs typeface="Arial"/>
@@ -18191,7 +18503,11 @@
               </a:rPr>
               <a:t>R can be decomposed into 3NF relations via the process of 3NF normalization </a:t>
             </a:r>
-            <a:endParaRPr dirty="0"/>
+            <a:endParaRPr dirty="0">
+              <a:highlight>
+                <a:srgbClr val="FFFF00"/>
+              </a:highlight>
+            </a:endParaRPr>
           </a:p>
         </p:txBody>
       </p:sp>
@@ -18307,6 +18623,9 @@
                 <a:solidFill>
                   <a:srgbClr val="800000"/>
                 </a:solidFill>
+                <a:highlight>
+                  <a:srgbClr val="FFFF00"/>
+                </a:highlight>
                 <a:latin typeface="Arial"/>
                 <a:ea typeface="Arial"/>
                 <a:cs typeface="Arial"/>
@@ -18314,7 +18633,11 @@
               </a:rPr>
               <a:t>In X -&gt; Y and Y -&gt; Z, with X as the primary key, we consider this a problem only if Y is not a part of a candidate key.</a:t>
             </a:r>
-            <a:endParaRPr lang="en-US" dirty="0"/>
+            <a:endParaRPr lang="en-US" dirty="0">
+              <a:highlight>
+                <a:srgbClr val="FFFF00"/>
+              </a:highlight>
+            </a:endParaRPr>
           </a:p>
           <a:p>
             <a:pPr lvl="1">
@@ -18336,6 +18659,9 @@
                 <a:solidFill>
                   <a:srgbClr val="800000"/>
                 </a:solidFill>
+                <a:highlight>
+                  <a:srgbClr val="FFFF00"/>
+                </a:highlight>
                 <a:latin typeface="Arial"/>
                 <a:ea typeface="Arial"/>
                 <a:cs typeface="Arial"/>
@@ -18343,7 +18669,11 @@
               </a:rPr>
               <a:t>When Y is a candidate key, there is no problem with the transitive dependency .</a:t>
             </a:r>
-            <a:endParaRPr lang="en-US" dirty="0"/>
+            <a:endParaRPr lang="en-US" dirty="0">
+              <a:highlight>
+                <a:srgbClr val="FFFF00"/>
+              </a:highlight>
+            </a:endParaRPr>
           </a:p>
           <a:p>
             <a:pPr lvl="1">
@@ -19143,6 +19473,9 @@
                 <a:solidFill>
                   <a:srgbClr val="800000"/>
                 </a:solidFill>
+                <a:highlight>
+                  <a:srgbClr val="FFFF00"/>
+                </a:highlight>
                 <a:latin typeface="Arial"/>
                 <a:ea typeface="Arial"/>
                 <a:cs typeface="Arial"/>
@@ -19150,7 +19483,11 @@
               </a:rPr>
               <a:t>Condition using keys and FDs of a relation to certify whether a relation schema is in a particular normal form </a:t>
             </a:r>
-            <a:endParaRPr dirty="0"/>
+            <a:endParaRPr dirty="0">
+              <a:highlight>
+                <a:srgbClr val="FFFF00"/>
+              </a:highlight>
+            </a:endParaRPr>
           </a:p>
         </p:txBody>
       </p:sp>
@@ -20407,7 +20744,7 @@
               <a:buChar char="■"/>
             </a:pPr>
             <a:r>
-              <a:rPr lang="en-US" sz="2800" b="0" i="0" u="none">
+              <a:rPr lang="en-US" sz="2800" b="0" i="0" u="none" dirty="0">
                 <a:solidFill>
                   <a:schemeClr val="dk2"/>
                 </a:solidFill>
@@ -20418,7 +20755,7 @@
               </a:rPr>
               <a:t>The above definitions consider the primary key only</a:t>
             </a:r>
-            <a:endParaRPr/>
+            <a:endParaRPr dirty="0"/>
           </a:p>
           <a:p>
             <a:pPr marL="342900" lvl="0" indent="-342900" algn="l" rtl="0">
@@ -20439,7 +20776,7 @@
               <a:buChar char="■"/>
             </a:pPr>
             <a:r>
-              <a:rPr lang="en-US" sz="2800" b="0" i="0" u="none">
+              <a:rPr lang="en-US" sz="2800" b="0" i="0" u="none" dirty="0">
                 <a:solidFill>
                   <a:schemeClr val="dk2"/>
                 </a:solidFill>
@@ -20450,7 +20787,7 @@
               </a:rPr>
               <a:t>The following more general definitions take into account relations with multiple candidate keys</a:t>
             </a:r>
-            <a:endParaRPr/>
+            <a:endParaRPr dirty="0"/>
           </a:p>
           <a:p>
             <a:pPr marL="342900" lvl="0" indent="-342900" algn="l" rtl="0">
@@ -20471,10 +20808,13 @@
               <a:buChar char="■"/>
             </a:pPr>
             <a:r>
-              <a:rPr lang="en-US" sz="2800" b="0" i="0" u="none">
+              <a:rPr lang="en-US" sz="2800" b="0" i="0" u="none" dirty="0">
                 <a:solidFill>
                   <a:schemeClr val="dk2"/>
                 </a:solidFill>
+                <a:highlight>
+                  <a:srgbClr val="FFFF00"/>
+                </a:highlight>
                 <a:latin typeface="Arial"/>
                 <a:ea typeface="Arial"/>
                 <a:cs typeface="Arial"/>
@@ -20483,10 +20823,13 @@
               <a:t>A relation schema R is in </a:t>
             </a:r>
             <a:r>
-              <a:rPr lang="en-US" sz="2800" b="1" i="0" u="none">
+              <a:rPr lang="en-US" sz="2800" b="1" i="0" u="none" dirty="0">
                 <a:solidFill>
                   <a:schemeClr val="dk2"/>
                 </a:solidFill>
+                <a:highlight>
+                  <a:srgbClr val="FFFF00"/>
+                </a:highlight>
                 <a:latin typeface="Arial"/>
                 <a:ea typeface="Arial"/>
                 <a:cs typeface="Arial"/>
@@ -20495,10 +20838,13 @@
               <a:t>second normal form (2NF)</a:t>
             </a:r>
             <a:r>
-              <a:rPr lang="en-US" sz="2800" b="0" i="0" u="none">
+              <a:rPr lang="en-US" sz="2800" b="0" i="0" u="none" dirty="0">
                 <a:solidFill>
                   <a:schemeClr val="dk2"/>
                 </a:solidFill>
+                <a:highlight>
+                  <a:srgbClr val="FFFF00"/>
+                </a:highlight>
                 <a:latin typeface="Arial"/>
                 <a:ea typeface="Arial"/>
                 <a:cs typeface="Arial"/>
@@ -20507,10 +20853,13 @@
               <a:t> if every non-prime attribute A in R is fully functionally dependent on </a:t>
             </a:r>
             <a:r>
-              <a:rPr lang="en-US" sz="2800" b="0" i="1" u="none">
+              <a:rPr lang="en-US" sz="2800" b="0" i="1" u="none" dirty="0">
                 <a:solidFill>
                   <a:schemeClr val="dk2"/>
                 </a:solidFill>
+                <a:highlight>
+                  <a:srgbClr val="FFFF00"/>
+                </a:highlight>
                 <a:latin typeface="Arial"/>
                 <a:ea typeface="Arial"/>
                 <a:cs typeface="Arial"/>
@@ -20519,10 +20868,13 @@
               <a:t>every</a:t>
             </a:r>
             <a:r>
-              <a:rPr lang="en-US" sz="2800" b="0" i="0" u="none">
+              <a:rPr lang="en-US" sz="2800" b="0" i="0" u="none" dirty="0">
                 <a:solidFill>
                   <a:schemeClr val="dk2"/>
                 </a:solidFill>
+                <a:highlight>
+                  <a:srgbClr val="FFFF00"/>
+                </a:highlight>
                 <a:latin typeface="Arial"/>
                 <a:ea typeface="Arial"/>
                 <a:cs typeface="Arial"/>
@@ -20530,7 +20882,11 @@
               </a:rPr>
               <a:t> key  of R </a:t>
             </a:r>
-            <a:endParaRPr/>
+            <a:endParaRPr dirty="0">
+              <a:highlight>
+                <a:srgbClr val="FFFF00"/>
+              </a:highlight>
+            </a:endParaRPr>
           </a:p>
         </p:txBody>
       </p:sp>
@@ -20774,7 +21130,7 @@
               <a:buChar char="■"/>
             </a:pPr>
             <a:r>
-              <a:rPr lang="en-US" sz="2800" b="0" i="0" u="none">
+              <a:rPr lang="en-US" sz="2800" b="0" i="0" u="none" dirty="0">
                 <a:solidFill>
                   <a:schemeClr val="dk2"/>
                 </a:solidFill>
@@ -20785,7 +21141,7 @@
               </a:rPr>
               <a:t>Definition:</a:t>
             </a:r>
-            <a:endParaRPr/>
+            <a:endParaRPr dirty="0"/>
           </a:p>
           <a:p>
             <a:pPr marL="742950" lvl="1" indent="-285750" algn="l" rtl="0">
@@ -20806,7 +21162,7 @@
               <a:buChar char="■"/>
             </a:pPr>
             <a:r>
-              <a:rPr lang="en-US" sz="2600" b="1" i="0" u="none">
+              <a:rPr lang="en-US" sz="2600" b="1" i="0" u="none" dirty="0" err="1">
                 <a:solidFill>
                   <a:srgbClr val="800000"/>
                 </a:solidFill>
@@ -20818,7 +21174,7 @@
               <a:t>Superkey</a:t>
             </a:r>
             <a:r>
-              <a:rPr lang="en-US" sz="2600" b="0" i="0" u="none">
+              <a:rPr lang="en-US" sz="2600" b="0" i="0" u="none" dirty="0">
                 <a:solidFill>
                   <a:srgbClr val="800000"/>
                 </a:solidFill>
@@ -20829,7 +21185,7 @@
               </a:rPr>
               <a:t> of relation schema R - a set of attributes S of R that contains a key of R</a:t>
             </a:r>
-            <a:endParaRPr/>
+            <a:endParaRPr dirty="0"/>
           </a:p>
           <a:p>
             <a:pPr marL="742950" lvl="1" indent="-194944" algn="l" rtl="0">
@@ -20849,7 +21205,7 @@
               <a:buFont typeface="Noto Sans Symbols"/>
               <a:buNone/>
             </a:pPr>
-            <a:endParaRPr sz="2600" b="0" i="0" u="none">
+            <a:endParaRPr sz="2600" b="0" i="0" u="none" dirty="0">
               <a:solidFill>
                 <a:srgbClr val="800000"/>
               </a:solidFill>
@@ -20878,10 +21234,13 @@
               <a:buChar char="■"/>
             </a:pPr>
             <a:r>
-              <a:rPr lang="en-US" sz="2600" b="0" i="0" u="none">
+              <a:rPr lang="en-US" sz="2600" b="0" i="0" u="none" dirty="0">
                 <a:solidFill>
                   <a:srgbClr val="800000"/>
                 </a:solidFill>
+                <a:highlight>
+                  <a:srgbClr val="FFFF00"/>
+                </a:highlight>
                 <a:latin typeface="Arial"/>
                 <a:ea typeface="Arial"/>
                 <a:cs typeface="Arial"/>
@@ -20890,10 +21249,13 @@
               <a:t>A relation schema R is in </a:t>
             </a:r>
             <a:r>
-              <a:rPr lang="en-US" sz="2600" b="1" i="0" u="none">
+              <a:rPr lang="en-US" sz="2600" b="1" i="0" u="none" dirty="0">
                 <a:solidFill>
                   <a:srgbClr val="800000"/>
                 </a:solidFill>
+                <a:highlight>
+                  <a:srgbClr val="FFFF00"/>
+                </a:highlight>
                 <a:latin typeface="Arial"/>
                 <a:ea typeface="Arial"/>
                 <a:cs typeface="Arial"/>
@@ -20902,10 +21264,13 @@
               <a:t>third normal form (3NF)</a:t>
             </a:r>
             <a:r>
-              <a:rPr lang="en-US" sz="2600" b="0" i="0" u="none">
+              <a:rPr lang="en-US" sz="2600" b="0" i="0" u="none" dirty="0">
                 <a:solidFill>
                   <a:srgbClr val="800000"/>
                 </a:solidFill>
+                <a:highlight>
+                  <a:srgbClr val="FFFF00"/>
+                </a:highlight>
                 <a:latin typeface="Arial"/>
                 <a:ea typeface="Arial"/>
                 <a:cs typeface="Arial"/>
@@ -20913,7 +21278,11 @@
               </a:rPr>
               <a:t> if whenever a FD X -&gt; A holds in R, then either: </a:t>
             </a:r>
-            <a:endParaRPr/>
+            <a:endParaRPr dirty="0">
+              <a:highlight>
+                <a:srgbClr val="FFFF00"/>
+              </a:highlight>
+            </a:endParaRPr>
           </a:p>
           <a:p>
             <a:pPr marL="1143000" lvl="2" indent="-228600" algn="l" rtl="0">
@@ -20934,10 +21303,13 @@
               <a:buChar char="■"/>
             </a:pPr>
             <a:r>
-              <a:rPr lang="en-US" sz="2400" b="0" i="0" u="none">
+              <a:rPr lang="en-US" sz="2400" b="0" i="0" u="none" dirty="0">
                 <a:solidFill>
                   <a:schemeClr val="dk2"/>
                 </a:solidFill>
+                <a:highlight>
+                  <a:srgbClr val="FFFF00"/>
+                </a:highlight>
                 <a:latin typeface="Arial"/>
                 <a:ea typeface="Arial"/>
                 <a:cs typeface="Arial"/>
@@ -20945,7 +21317,11 @@
               </a:rPr>
               <a:t>(a) X is a key of R, or </a:t>
             </a:r>
-            <a:endParaRPr/>
+            <a:endParaRPr dirty="0">
+              <a:highlight>
+                <a:srgbClr val="FFFF00"/>
+              </a:highlight>
+            </a:endParaRPr>
           </a:p>
           <a:p>
             <a:pPr marL="1143000" lvl="2" indent="-228600" algn="l" rtl="0">
@@ -20966,10 +21342,13 @@
               <a:buChar char="■"/>
             </a:pPr>
             <a:r>
-              <a:rPr lang="en-US" sz="2400" b="0" i="0" u="none">
+              <a:rPr lang="en-US" sz="2400" b="0" i="0" u="none" dirty="0">
                 <a:solidFill>
                   <a:schemeClr val="dk2"/>
                 </a:solidFill>
+                <a:highlight>
+                  <a:srgbClr val="FFFF00"/>
+                </a:highlight>
                 <a:latin typeface="Arial"/>
                 <a:ea typeface="Arial"/>
                 <a:cs typeface="Arial"/>
@@ -20977,7 +21356,11 @@
               </a:rPr>
               <a:t>(b) A is a prime attribute of R</a:t>
             </a:r>
-            <a:endParaRPr/>
+            <a:endParaRPr dirty="0">
+              <a:highlight>
+                <a:srgbClr val="FFFF00"/>
+              </a:highlight>
+            </a:endParaRPr>
           </a:p>
           <a:p>
             <a:pPr marL="342900" lvl="0" indent="-251459" algn="l" rtl="0">
@@ -20993,7 +21376,7 @@
               <a:buSzPts val="1440"/>
               <a:buNone/>
             </a:pPr>
-            <a:endParaRPr sz="2400" b="0" i="0" u="none">
+            <a:endParaRPr sz="2400" b="0" i="0" u="none" dirty="0">
               <a:solidFill>
                 <a:schemeClr val="dk2"/>
               </a:solidFill>
@@ -21250,6 +21633,9 @@
                 <a:solidFill>
                   <a:schemeClr val="dk2"/>
                 </a:solidFill>
+                <a:highlight>
+                  <a:srgbClr val="FFFF00"/>
+                </a:highlight>
                 <a:latin typeface="Arial"/>
                 <a:ea typeface="Arial"/>
                 <a:cs typeface="Arial"/>
@@ -21262,6 +21648,9 @@
                 <a:solidFill>
                   <a:schemeClr val="dk2"/>
                 </a:solidFill>
+                <a:highlight>
+                  <a:srgbClr val="FFFF00"/>
+                </a:highlight>
                 <a:latin typeface="Arial"/>
                 <a:ea typeface="Arial"/>
                 <a:cs typeface="Arial"/>
@@ -21274,6 +21663,9 @@
                 <a:solidFill>
                   <a:schemeClr val="dk2"/>
                 </a:solidFill>
+                <a:highlight>
+                  <a:srgbClr val="FFFF00"/>
+                </a:highlight>
                 <a:latin typeface="Arial"/>
                 <a:ea typeface="Arial"/>
                 <a:cs typeface="Arial"/>
@@ -21286,6 +21678,9 @@
                 <a:solidFill>
                   <a:schemeClr val="dk2"/>
                 </a:solidFill>
+                <a:highlight>
+                  <a:srgbClr val="FFFF00"/>
+                </a:highlight>
                 <a:latin typeface="Arial"/>
                 <a:ea typeface="Arial"/>
                 <a:cs typeface="Arial"/>
@@ -21298,6 +21693,9 @@
                 <a:solidFill>
                   <a:schemeClr val="dk2"/>
                 </a:solidFill>
+                <a:highlight>
+                  <a:srgbClr val="FFFF00"/>
+                </a:highlight>
                 <a:latin typeface="Arial"/>
                 <a:ea typeface="Arial"/>
                 <a:cs typeface="Arial"/>
@@ -21310,6 +21708,9 @@
                 <a:solidFill>
                   <a:schemeClr val="dk2"/>
                 </a:solidFill>
+                <a:highlight>
+                  <a:srgbClr val="FFFF00"/>
+                </a:highlight>
                 <a:latin typeface="Arial"/>
                 <a:ea typeface="Arial"/>
                 <a:cs typeface="Arial"/>
@@ -21322,6 +21723,9 @@
                 <a:solidFill>
                   <a:schemeClr val="dk2"/>
                 </a:solidFill>
+                <a:highlight>
+                  <a:srgbClr val="FFFF00"/>
+                </a:highlight>
                 <a:latin typeface="Arial"/>
                 <a:ea typeface="Arial"/>
                 <a:cs typeface="Arial"/>
@@ -21334,6 +21738,9 @@
                 <a:solidFill>
                   <a:schemeClr val="dk2"/>
                 </a:solidFill>
+                <a:highlight>
+                  <a:srgbClr val="FFFF00"/>
+                </a:highlight>
                 <a:latin typeface="Arial"/>
                 <a:ea typeface="Arial"/>
                 <a:cs typeface="Arial"/>
@@ -21346,6 +21753,9 @@
                 <a:solidFill>
                   <a:schemeClr val="dk2"/>
                 </a:solidFill>
+                <a:highlight>
+                  <a:srgbClr val="FFFF00"/>
+                </a:highlight>
                 <a:latin typeface="Arial"/>
                 <a:ea typeface="Arial"/>
                 <a:cs typeface="Arial"/>
@@ -21358,6 +21768,9 @@
                 <a:solidFill>
                   <a:schemeClr val="dk2"/>
                 </a:solidFill>
+                <a:highlight>
+                  <a:srgbClr val="FFFF00"/>
+                </a:highlight>
                 <a:latin typeface="Arial"/>
                 <a:ea typeface="Arial"/>
                 <a:cs typeface="Arial"/>
@@ -21406,6 +21819,9 @@
                 <a:solidFill>
                   <a:schemeClr val="dk2"/>
                 </a:solidFill>
+                <a:highlight>
+                  <a:srgbClr val="FFFF00"/>
+                </a:highlight>
                 <a:latin typeface="Arial"/>
                 <a:ea typeface="Arial"/>
                 <a:cs typeface="Arial"/>
@@ -21413,7 +21829,11 @@
               </a:rPr>
               <a:t>Each normal form is strictly stronger than the previous one</a:t>
             </a:r>
-            <a:endParaRPr dirty="0"/>
+            <a:endParaRPr dirty="0">
+              <a:highlight>
+                <a:srgbClr val="FFFF00"/>
+              </a:highlight>
+            </a:endParaRPr>
           </a:p>
           <a:p>
             <a:pPr marL="742950" lvl="1" indent="-285750" algn="l" rtl="0">
@@ -21438,6 +21858,9 @@
                 <a:solidFill>
                   <a:srgbClr val="800000"/>
                 </a:solidFill>
+                <a:highlight>
+                  <a:srgbClr val="FFFF00"/>
+                </a:highlight>
                 <a:latin typeface="Arial"/>
                 <a:ea typeface="Arial"/>
                 <a:cs typeface="Arial"/>
@@ -21445,7 +21868,11 @@
               </a:rPr>
               <a:t>Every 2NF relation is in 1NF</a:t>
             </a:r>
-            <a:endParaRPr dirty="0"/>
+            <a:endParaRPr dirty="0">
+              <a:highlight>
+                <a:srgbClr val="FFFF00"/>
+              </a:highlight>
+            </a:endParaRPr>
           </a:p>
           <a:p>
             <a:pPr marL="742950" lvl="1" indent="-285750" algn="l" rtl="0">
@@ -21470,6 +21897,9 @@
                 <a:solidFill>
                   <a:srgbClr val="800000"/>
                 </a:solidFill>
+                <a:highlight>
+                  <a:srgbClr val="FFFF00"/>
+                </a:highlight>
                 <a:latin typeface="Arial"/>
                 <a:ea typeface="Arial"/>
                 <a:cs typeface="Arial"/>
@@ -21477,7 +21907,11 @@
               </a:rPr>
               <a:t>Every 3NF relation is in 2NF</a:t>
             </a:r>
-            <a:endParaRPr dirty="0"/>
+            <a:endParaRPr dirty="0">
+              <a:highlight>
+                <a:srgbClr val="FFFF00"/>
+              </a:highlight>
+            </a:endParaRPr>
           </a:p>
           <a:p>
             <a:pPr marL="742950" lvl="1" indent="-285750" algn="l" rtl="0">
@@ -21502,6 +21936,9 @@
                 <a:solidFill>
                   <a:srgbClr val="800000"/>
                 </a:solidFill>
+                <a:highlight>
+                  <a:srgbClr val="FFFF00"/>
+                </a:highlight>
                 <a:latin typeface="Arial"/>
                 <a:ea typeface="Arial"/>
                 <a:cs typeface="Arial"/>
@@ -21509,7 +21946,11 @@
               </a:rPr>
               <a:t>Every BCNF relation is in 3NF</a:t>
             </a:r>
-            <a:endParaRPr dirty="0"/>
+            <a:endParaRPr dirty="0">
+              <a:highlight>
+                <a:srgbClr val="FFFF00"/>
+              </a:highlight>
+            </a:endParaRPr>
           </a:p>
           <a:p>
             <a:pPr marL="342900" lvl="0" indent="-342900" algn="l" rtl="0">
@@ -21534,6 +21975,9 @@
                 <a:solidFill>
                   <a:srgbClr val="FF0000"/>
                 </a:solidFill>
+                <a:highlight>
+                  <a:srgbClr val="FFFF00"/>
+                </a:highlight>
                 <a:latin typeface="Arial"/>
                 <a:ea typeface="Arial"/>
                 <a:cs typeface="Arial"/>
@@ -21541,7 +21985,11 @@
               </a:rPr>
               <a:t>There exist relations that are in 3NF but not in BCNF</a:t>
             </a:r>
-            <a:endParaRPr dirty="0"/>
+            <a:endParaRPr dirty="0">
+              <a:highlight>
+                <a:srgbClr val="FFFF00"/>
+              </a:highlight>
+            </a:endParaRPr>
           </a:p>
           <a:p>
             <a:pPr marL="342900" lvl="0" indent="-342900" algn="l" rtl="0">
@@ -21566,6 +22014,9 @@
                 <a:solidFill>
                   <a:srgbClr val="FF0000"/>
                 </a:solidFill>
+                <a:highlight>
+                  <a:srgbClr val="FFFF00"/>
+                </a:highlight>
                 <a:latin typeface="Arial"/>
                 <a:ea typeface="Arial"/>
                 <a:cs typeface="Arial"/>
@@ -21573,7 +22024,11 @@
               </a:rPr>
               <a:t>The goal is to have each relation in BCNF (or 3NF) </a:t>
             </a:r>
-            <a:endParaRPr dirty="0"/>
+            <a:endParaRPr dirty="0">
+              <a:highlight>
+                <a:srgbClr val="FFFF00"/>
+              </a:highlight>
+            </a:endParaRPr>
           </a:p>
         </p:txBody>
       </p:sp>
@@ -23337,6 +23792,9 @@
                 <a:solidFill>
                   <a:schemeClr val="dk2"/>
                 </a:solidFill>
+                <a:highlight>
+                  <a:srgbClr val="FFFF00"/>
+                </a:highlight>
                 <a:latin typeface="Arial"/>
                 <a:ea typeface="Arial"/>
                 <a:cs typeface="Arial"/>
@@ -23349,6 +23807,9 @@
                 <a:solidFill>
                   <a:schemeClr val="dk2"/>
                 </a:solidFill>
+                <a:highlight>
+                  <a:srgbClr val="FFFF00"/>
+                </a:highlight>
                 <a:latin typeface="Arial"/>
                 <a:ea typeface="Arial"/>
                 <a:cs typeface="Arial"/>
@@ -23361,6 +23822,9 @@
                 <a:solidFill>
                   <a:schemeClr val="dk2"/>
                 </a:solidFill>
+                <a:highlight>
+                  <a:srgbClr val="FFFF00"/>
+                </a:highlight>
                 <a:latin typeface="Arial"/>
                 <a:ea typeface="Arial"/>
                 <a:cs typeface="Arial"/>
@@ -23368,7 +23832,11 @@
               </a:rPr>
               <a:t> in BCNF should be decomposed so as to meet this property, while possibly forgoing the preservation of all functional dependencies in the decomposed relations.</a:t>
             </a:r>
-            <a:endParaRPr dirty="0"/>
+            <a:endParaRPr dirty="0">
+              <a:highlight>
+                <a:srgbClr val="FFFF00"/>
+              </a:highlight>
+            </a:endParaRPr>
           </a:p>
           <a:p>
             <a:pPr marL="742950" lvl="1" indent="-285750" algn="l" rtl="0">
@@ -25799,40 +26267,63 @@
           </a:bodyPr>
           <a:lstStyle/>
           <a:p>
-            <a:endParaRPr lang="en-US" dirty="0"/>
-          </a:p>
-          <a:p>
-            <a:endParaRPr lang="en-US" dirty="0"/>
-          </a:p>
-          <a:p>
-            <a:endParaRPr lang="en-US" dirty="0"/>
-          </a:p>
-          <a:p>
-            <a:r>
-              <a:rPr lang="en-IN" b="1" u="sng" dirty="0"/>
-              <a:t>Lossless Join Decomposition </a:t>
-            </a:r>
-            <a:r>
-              <a:rPr lang="en-IN" b="1" u="sng"/>
-              <a:t>(Non-additive):</a:t>
-            </a:r>
-            <a:endParaRPr lang="en-IN" b="1" u="sng" dirty="0"/>
-          </a:p>
-          <a:p>
-            <a:r>
-              <a:rPr lang="en-US" dirty="0"/>
+            <a:endParaRPr lang="en-US" dirty="0">
+              <a:highlight>
+                <a:srgbClr val="FFFF00"/>
+              </a:highlight>
+            </a:endParaRPr>
+          </a:p>
+          <a:p>
+            <a:endParaRPr lang="en-US" dirty="0">
+              <a:highlight>
+                <a:srgbClr val="FFFF00"/>
+              </a:highlight>
+            </a:endParaRPr>
+          </a:p>
+          <a:p>
+            <a:endParaRPr lang="en-US" dirty="0">
+              <a:highlight>
+                <a:srgbClr val="FFFF00"/>
+              </a:highlight>
+            </a:endParaRPr>
+          </a:p>
+          <a:p>
+            <a:r>
+              <a:rPr lang="en-IN" b="1" u="sng" dirty="0">
+                <a:highlight>
+                  <a:srgbClr val="FFFF00"/>
+                </a:highlight>
+              </a:rPr>
+              <a:t>Lossless Join Decomposition (Non-additive):</a:t>
+            </a:r>
+          </a:p>
+          <a:p>
+            <a:r>
+              <a:rPr lang="en-US" dirty="0">
+                <a:highlight>
+                  <a:srgbClr val="FFFF00"/>
+                </a:highlight>
+              </a:rPr>
               <a:t>Consider there is a relation R which is decomposed into sub relations R1 , R2 , …. , Rn. </a:t>
             </a:r>
           </a:p>
           <a:p>
             <a:r>
-              <a:rPr lang="en-US" dirty="0"/>
+              <a:rPr lang="en-US" dirty="0">
+                <a:highlight>
+                  <a:srgbClr val="FFFF00"/>
+                </a:highlight>
+              </a:rPr>
               <a:t>This decomposition is called lossless join decomposition when the join of the sub relations results in the same relation R that was decomposed.  </a:t>
             </a:r>
           </a:p>
           <a:p>
             <a:r>
-              <a:rPr lang="en-US" dirty="0"/>
+              <a:rPr lang="en-US" dirty="0">
+                <a:highlight>
+                  <a:srgbClr val="FFFF00"/>
+                </a:highlight>
+              </a:rPr>
               <a:t>For lossless join decomposition, we always have</a:t>
             </a:r>
           </a:p>
@@ -25841,14 +26332,26 @@
               <a:buNone/>
             </a:pPr>
             <a:r>
-              <a:rPr lang="pt-BR" dirty="0"/>
+              <a:rPr lang="pt-BR" dirty="0">
+                <a:highlight>
+                  <a:srgbClr val="FFFF00"/>
+                </a:highlight>
+              </a:rPr>
               <a:t>    R1 ⋈ R2 ⋈ R3 ……. ⋈ Rn = R, </a:t>
             </a:r>
             <a:r>
-              <a:rPr lang="en-US" dirty="0"/>
+              <a:rPr lang="en-US" dirty="0">
+                <a:highlight>
+                  <a:srgbClr val="FFFF00"/>
+                </a:highlight>
+              </a:rPr>
               <a:t>where ⋈ is a natural join   operator</a:t>
             </a:r>
-            <a:endParaRPr lang="en-IN" dirty="0"/>
+            <a:endParaRPr lang="en-IN" dirty="0">
+              <a:highlight>
+                <a:srgbClr val="FFFF00"/>
+              </a:highlight>
+            </a:endParaRPr>
           </a:p>
         </p:txBody>
       </p:sp>
@@ -25989,15 +26492,27 @@
           </a:p>
           <a:p>
             <a:r>
-              <a:rPr lang="en-US" sz="2600" dirty="0"/>
+              <a:rPr lang="en-US" sz="2600" dirty="0">
+                <a:highlight>
+                  <a:srgbClr val="FFFF00"/>
+                </a:highlight>
+              </a:rPr>
               <a:t>This decomposition is called </a:t>
             </a:r>
             <a:r>
-              <a:rPr lang="en-US" sz="2600" dirty="0" err="1"/>
+              <a:rPr lang="en-US" sz="2600" dirty="0" err="1">
+                <a:highlight>
+                  <a:srgbClr val="FFFF00"/>
+                </a:highlight>
+              </a:rPr>
               <a:t>lossy</a:t>
             </a:r>
             <a:r>
-              <a:rPr lang="en-US" sz="2600" dirty="0"/>
+              <a:rPr lang="en-US" sz="2600" dirty="0">
+                <a:highlight>
+                  <a:srgbClr val="FFFF00"/>
+                </a:highlight>
+              </a:rPr>
               <a:t> join decomposition when the join of the sub relations does not result in the same relation R that was decomposed.  </a:t>
             </a:r>
           </a:p>
@@ -26165,16 +26680,28 @@
           </a:p>
           <a:p>
             <a:r>
-              <a:rPr lang="en-US" dirty="0"/>
+              <a:rPr lang="en-US" dirty="0">
+                <a:highlight>
+                  <a:srgbClr val="FFFF00"/>
+                </a:highlight>
+              </a:rPr>
               <a:t>Union of both the sub relations must contain all the attributes that are present in the original relation R. </a:t>
             </a:r>
           </a:p>
           <a:p>
             <a:r>
-              <a:rPr lang="en-US" dirty="0"/>
+              <a:rPr lang="en-US" dirty="0">
+                <a:highlight>
+                  <a:srgbClr val="FFFF00"/>
+                </a:highlight>
+              </a:rPr>
               <a:t>Thus, R1 ∪ R2 = R</a:t>
             </a:r>
-            <a:endParaRPr lang="en-IN" dirty="0"/>
+            <a:endParaRPr lang="en-IN" dirty="0">
+              <a:highlight>
+                <a:srgbClr val="FFFF00"/>
+              </a:highlight>
+            </a:endParaRPr>
           </a:p>
         </p:txBody>
       </p:sp>
@@ -26271,7 +26798,15 @@
           <a:p>
             <a:r>
               <a:rPr lang="en-US" dirty="0"/>
-              <a:t>In other words, there must be some common attribute which is present in both the sub relations. </a:t>
+              <a:t>In other words,</a:t>
+            </a:r>
+            <a:r>
+              <a:rPr lang="en-US" dirty="0">
+                <a:highlight>
+                  <a:srgbClr val="FFFF00"/>
+                </a:highlight>
+              </a:rPr>
+              <a:t> there must be some common attribute which is present in both the sub relations. </a:t>
             </a:r>
           </a:p>
           <a:p>
@@ -26288,16 +26823,28 @@
           </a:p>
           <a:p>
             <a:r>
-              <a:rPr lang="en-US" dirty="0"/>
+              <a:rPr lang="en-US" dirty="0">
+                <a:highlight>
+                  <a:srgbClr val="FFFF00"/>
+                </a:highlight>
+              </a:rPr>
               <a:t>Intersection of both the sub relations must be a super key of either R1 or R2 or both. </a:t>
             </a:r>
           </a:p>
           <a:p>
             <a:r>
-              <a:rPr lang="en-US" dirty="0"/>
+              <a:rPr lang="en-US" dirty="0">
+                <a:highlight>
+                  <a:srgbClr val="FFFF00"/>
+                </a:highlight>
+              </a:rPr>
               <a:t>Thus, R1 ∩ R2 = Super key of R1 or R2</a:t>
             </a:r>
-            <a:endParaRPr lang="en-IN" dirty="0"/>
+            <a:endParaRPr lang="en-IN" dirty="0">
+              <a:highlight>
+                <a:srgbClr val="FFFF00"/>
+              </a:highlight>
+            </a:endParaRPr>
           </a:p>
         </p:txBody>
       </p:sp>
@@ -26377,94 +26924,154 @@
           <a:p>
             <a:pPr fontAlgn="base"/>
             <a:r>
-              <a:rPr lang="en-US" b="1" dirty="0"/>
+              <a:rPr lang="en-US" b="1" dirty="0">
+                <a:highlight>
+                  <a:srgbClr val="FFFF00"/>
+                </a:highlight>
+              </a:rPr>
               <a:t>Lossless:</a:t>
             </a:r>
             <a:r>
-              <a:rPr lang="en-US" dirty="0"/>
+              <a:rPr lang="en-US" dirty="0">
+                <a:highlight>
+                  <a:srgbClr val="FFFF00"/>
+                </a:highlight>
+              </a:rPr>
               <a:t> </a:t>
             </a:r>
           </a:p>
           <a:p>
             <a:pPr fontAlgn="base"/>
             <a:r>
-              <a:rPr lang="en-US" dirty="0"/>
+              <a:rPr lang="en-US" dirty="0">
+                <a:highlight>
+                  <a:srgbClr val="FFFF00"/>
+                </a:highlight>
+              </a:rPr>
               <a:t>All the decomposition that we perform in Database management system should be lossless. </a:t>
             </a:r>
           </a:p>
           <a:p>
             <a:pPr fontAlgn="base"/>
             <a:r>
-              <a:rPr lang="en-US" dirty="0"/>
+              <a:rPr lang="en-US" dirty="0">
+                <a:highlight>
+                  <a:srgbClr val="FFFF00"/>
+                </a:highlight>
+              </a:rPr>
               <a:t>All the information should not be lost while performing the join on the sub-relation to get back the original relation. It helps to remove the redundant data from the database.</a:t>
             </a:r>
           </a:p>
           <a:p>
             <a:pPr fontAlgn="base"/>
             <a:r>
-              <a:rPr lang="en-US" b="1" dirty="0"/>
+              <a:rPr lang="en-US" b="1" dirty="0">
+                <a:highlight>
+                  <a:srgbClr val="FFFF00"/>
+                </a:highlight>
+              </a:rPr>
               <a:t>Dependency Preservation:</a:t>
             </a:r>
             <a:r>
-              <a:rPr lang="en-US" dirty="0"/>
+              <a:rPr lang="en-US" dirty="0">
+                <a:highlight>
+                  <a:srgbClr val="FFFF00"/>
+                </a:highlight>
+              </a:rPr>
               <a:t> </a:t>
             </a:r>
           </a:p>
           <a:p>
             <a:pPr fontAlgn="base"/>
             <a:r>
-              <a:rPr lang="en-US" dirty="0"/>
+              <a:rPr lang="en-US" dirty="0">
+                <a:highlight>
+                  <a:srgbClr val="FFFF00"/>
+                </a:highlight>
+              </a:rPr>
               <a:t>Dependency Preservation is an important technique in database management system. </a:t>
             </a:r>
           </a:p>
           <a:p>
             <a:pPr fontAlgn="base"/>
             <a:r>
-              <a:rPr lang="en-US" dirty="0"/>
+              <a:rPr lang="en-US" dirty="0">
+                <a:highlight>
+                  <a:srgbClr val="FFFF00"/>
+                </a:highlight>
+              </a:rPr>
               <a:t>It ensures that the functional dependencies between the entities is maintained while performing decomposition. </a:t>
             </a:r>
           </a:p>
           <a:p>
             <a:pPr fontAlgn="base"/>
             <a:r>
-              <a:rPr lang="en-US" dirty="0"/>
+              <a:rPr lang="en-US" dirty="0">
+                <a:highlight>
+                  <a:srgbClr val="FFFF00"/>
+                </a:highlight>
+              </a:rPr>
               <a:t>It helps to improve the database efficiency, maintain consistency and integrity.</a:t>
             </a:r>
           </a:p>
           <a:p>
             <a:pPr fontAlgn="base"/>
             <a:r>
-              <a:rPr lang="en-US" b="1" dirty="0"/>
+              <a:rPr lang="en-US" b="1" dirty="0">
+                <a:highlight>
+                  <a:srgbClr val="FFFF00"/>
+                </a:highlight>
+              </a:rPr>
               <a:t>Lack of Data Redundancy:</a:t>
             </a:r>
             <a:r>
-              <a:rPr lang="en-US" dirty="0"/>
+              <a:rPr lang="en-US" dirty="0">
+                <a:highlight>
+                  <a:srgbClr val="FFFF00"/>
+                </a:highlight>
+              </a:rPr>
               <a:t> </a:t>
             </a:r>
           </a:p>
           <a:p>
             <a:pPr fontAlgn="base"/>
             <a:r>
-              <a:rPr lang="en-US" dirty="0"/>
+              <a:rPr lang="en-US" dirty="0">
+                <a:highlight>
+                  <a:srgbClr val="FFFF00"/>
+                </a:highlight>
+              </a:rPr>
               <a:t>Data Redundancy is generally termed as duplicate data or repeated data. </a:t>
             </a:r>
           </a:p>
           <a:p>
             <a:pPr fontAlgn="base"/>
             <a:r>
-              <a:rPr lang="en-US" dirty="0"/>
+              <a:rPr lang="en-US" dirty="0">
+                <a:highlight>
+                  <a:srgbClr val="FFFF00"/>
+                </a:highlight>
+              </a:rPr>
               <a:t>This property states that the decomposition performed should not suffer redundant data. </a:t>
             </a:r>
           </a:p>
           <a:p>
             <a:pPr fontAlgn="base"/>
             <a:r>
-              <a:rPr lang="en-US" dirty="0"/>
+              <a:rPr lang="en-US" dirty="0">
+                <a:highlight>
+                  <a:srgbClr val="FFFF00"/>
+                </a:highlight>
+              </a:rPr>
               <a:t>It will help us to get rid of unwanted data and focus only on the useful data or information.</a:t>
             </a:r>
           </a:p>
           <a:p>
-            <a:endParaRPr lang="en-IN" dirty="0"/>
+            <a:endParaRPr lang="en-IN" dirty="0">
+              <a:highlight>
+                <a:srgbClr val="FFFF00"/>
+              </a:highlight>
+            </a:endParaRPr>
           </a:p>
         </p:txBody>
       </p:sp>
@@ -26757,10 +27364,13 @@
               <a:buChar char="■"/>
             </a:pPr>
             <a:r>
-              <a:rPr lang="en-US" sz="2400" b="1" i="0" u="none">
+              <a:rPr lang="en-US" sz="2400" b="1" i="0" u="none" dirty="0">
                 <a:solidFill>
                   <a:schemeClr val="dk2"/>
                 </a:solidFill>
+                <a:highlight>
+                  <a:srgbClr val="FFFF00"/>
+                </a:highlight>
                 <a:latin typeface="Arial"/>
                 <a:ea typeface="Arial"/>
                 <a:cs typeface="Arial"/>
@@ -26769,10 +27379,13 @@
               <a:t>Normalization</a:t>
             </a:r>
             <a:r>
-              <a:rPr lang="en-US" sz="2400" b="0" i="0" u="none">
+              <a:rPr lang="en-US" sz="2400" b="0" i="0" u="none" dirty="0">
                 <a:solidFill>
                   <a:schemeClr val="dk2"/>
                 </a:solidFill>
+                <a:highlight>
+                  <a:srgbClr val="FFFF00"/>
+                </a:highlight>
                 <a:latin typeface="Arial"/>
                 <a:ea typeface="Arial"/>
                 <a:cs typeface="Arial"/>
@@ -26780,7 +27393,11 @@
               </a:rPr>
               <a:t> is carried out in practice so that the resulting designs are of high quality and meet the desirable properties </a:t>
             </a:r>
-            <a:endParaRPr/>
+            <a:endParaRPr dirty="0">
+              <a:highlight>
+                <a:srgbClr val="FFFF00"/>
+              </a:highlight>
+            </a:endParaRPr>
           </a:p>
           <a:p>
             <a:pPr marL="342900" lvl="0" indent="-342900" algn="l" rtl="0">
@@ -26801,10 +27418,13 @@
               <a:buChar char="■"/>
             </a:pPr>
             <a:r>
-              <a:rPr lang="en-US" sz="2400" b="0" i="0" u="none">
+              <a:rPr lang="en-US" sz="2400" b="0" i="0" u="none" dirty="0">
                 <a:solidFill>
                   <a:schemeClr val="dk2"/>
                 </a:solidFill>
+                <a:highlight>
+                  <a:srgbClr val="FFFF00"/>
+                </a:highlight>
                 <a:latin typeface="Arial"/>
                 <a:ea typeface="Arial"/>
                 <a:cs typeface="Arial"/>
@@ -26813,10 +27433,13 @@
               <a:t>The practical utility of these normal forms becomes questionable when the constraints on which they are based are </a:t>
             </a:r>
             <a:r>
-              <a:rPr lang="en-US" sz="2400" b="0" i="1" u="none">
+              <a:rPr lang="en-US" sz="2400" b="0" i="1" u="none" dirty="0">
                 <a:solidFill>
                   <a:schemeClr val="dk2"/>
                 </a:solidFill>
+                <a:highlight>
+                  <a:srgbClr val="FFFF00"/>
+                </a:highlight>
                 <a:latin typeface="Arial"/>
                 <a:ea typeface="Arial"/>
                 <a:cs typeface="Arial"/>
@@ -26825,10 +27448,13 @@
               <a:t>hard to understand</a:t>
             </a:r>
             <a:r>
-              <a:rPr lang="en-US" sz="2400" b="0" i="0" u="none">
+              <a:rPr lang="en-US" sz="2400" b="0" i="0" u="none" dirty="0">
                 <a:solidFill>
                   <a:schemeClr val="dk2"/>
                 </a:solidFill>
+                <a:highlight>
+                  <a:srgbClr val="FFFF00"/>
+                </a:highlight>
                 <a:latin typeface="Arial"/>
                 <a:ea typeface="Arial"/>
                 <a:cs typeface="Arial"/>
@@ -26837,10 +27463,13 @@
               <a:t> or to </a:t>
             </a:r>
             <a:r>
-              <a:rPr lang="en-US" sz="2400" b="0" i="1" u="none">
+              <a:rPr lang="en-US" sz="2400" b="0" i="1" u="none" dirty="0">
                 <a:solidFill>
                   <a:schemeClr val="dk2"/>
                 </a:solidFill>
+                <a:highlight>
+                  <a:srgbClr val="FFFF00"/>
+                </a:highlight>
                 <a:latin typeface="Arial"/>
                 <a:ea typeface="Arial"/>
                 <a:cs typeface="Arial"/>
@@ -26848,7 +27477,11 @@
               </a:rPr>
               <a:t>detect</a:t>
             </a:r>
-            <a:endParaRPr/>
+            <a:endParaRPr dirty="0">
+              <a:highlight>
+                <a:srgbClr val="FFFF00"/>
+              </a:highlight>
+            </a:endParaRPr>
           </a:p>
           <a:p>
             <a:pPr marL="342900" lvl="0" indent="-342900" algn="l" rtl="0">
@@ -26869,10 +27502,13 @@
               <a:buChar char="■"/>
             </a:pPr>
             <a:r>
-              <a:rPr lang="en-US" sz="2400" b="0" i="0" u="none">
+              <a:rPr lang="en-US" sz="2400" b="0" i="0" u="none" dirty="0">
                 <a:solidFill>
                   <a:schemeClr val="dk2"/>
                 </a:solidFill>
+                <a:highlight>
+                  <a:srgbClr val="FFFF00"/>
+                </a:highlight>
                 <a:latin typeface="Arial"/>
                 <a:ea typeface="Arial"/>
                 <a:cs typeface="Arial"/>
@@ -26881,10 +27517,13 @@
               <a:t>The database designers </a:t>
             </a:r>
             <a:r>
-              <a:rPr lang="en-US" sz="2400" b="0" i="1" u="none">
+              <a:rPr lang="en-US" sz="2400" b="0" i="1" u="none" dirty="0">
                 <a:solidFill>
                   <a:schemeClr val="dk2"/>
                 </a:solidFill>
+                <a:highlight>
+                  <a:srgbClr val="FFFF00"/>
+                </a:highlight>
                 <a:latin typeface="Arial"/>
                 <a:ea typeface="Arial"/>
                 <a:cs typeface="Arial"/>
@@ -26893,10 +27532,13 @@
               <a:t>need not</a:t>
             </a:r>
             <a:r>
-              <a:rPr lang="en-US" sz="2400" b="0" i="0" u="none">
+              <a:rPr lang="en-US" sz="2400" b="0" i="0" u="none" dirty="0">
                 <a:solidFill>
                   <a:schemeClr val="dk2"/>
                 </a:solidFill>
+                <a:highlight>
+                  <a:srgbClr val="FFFF00"/>
+                </a:highlight>
                 <a:latin typeface="Arial"/>
                 <a:ea typeface="Arial"/>
                 <a:cs typeface="Arial"/>
@@ -26904,7 +27546,11 @@
               </a:rPr>
               <a:t> normalize to the highest possible normal form</a:t>
             </a:r>
-            <a:endParaRPr/>
+            <a:endParaRPr dirty="0">
+              <a:highlight>
+                <a:srgbClr val="FFFF00"/>
+              </a:highlight>
+            </a:endParaRPr>
           </a:p>
           <a:p>
             <a:pPr marL="742950" lvl="1" indent="-285750" algn="l" rtl="0">
@@ -26925,10 +27571,13 @@
               <a:buChar char="■"/>
             </a:pPr>
             <a:r>
-              <a:rPr lang="en-US" sz="2200" b="0" i="0" u="none">
+              <a:rPr lang="en-US" sz="2200" b="0" i="0" u="none" dirty="0">
                 <a:solidFill>
                   <a:srgbClr val="800000"/>
                 </a:solidFill>
+                <a:highlight>
+                  <a:srgbClr val="FFFF00"/>
+                </a:highlight>
                 <a:latin typeface="Arial"/>
                 <a:ea typeface="Arial"/>
                 <a:cs typeface="Arial"/>
@@ -26936,7 +27585,11 @@
               </a:rPr>
               <a:t>(usually up to 3NF, BCNF or 4NF)</a:t>
             </a:r>
-            <a:endParaRPr/>
+            <a:endParaRPr dirty="0">
+              <a:highlight>
+                <a:srgbClr val="FFFF00"/>
+              </a:highlight>
+            </a:endParaRPr>
           </a:p>
           <a:p>
             <a:pPr marL="342900" lvl="0" indent="-342900" algn="l" rtl="0">
@@ -26957,7 +27610,7 @@
               <a:buChar char="■"/>
             </a:pPr>
             <a:r>
-              <a:rPr lang="en-US" sz="2400" b="1" i="0" u="none">
+              <a:rPr lang="en-US" sz="2400" b="1" i="0" u="none" dirty="0">
                 <a:solidFill>
                   <a:schemeClr val="dk2"/>
                 </a:solidFill>
@@ -26969,7 +27622,7 @@
               <a:t>Denormalization</a:t>
             </a:r>
             <a:r>
-              <a:rPr lang="en-US" sz="2400" b="0" i="0" u="none">
+              <a:rPr lang="en-US" sz="2400" b="0" i="0" u="none" dirty="0">
                 <a:solidFill>
                   <a:schemeClr val="dk2"/>
                 </a:solidFill>
@@ -26980,7 +27633,7 @@
               </a:rPr>
               <a:t>:</a:t>
             </a:r>
-            <a:endParaRPr/>
+            <a:endParaRPr dirty="0"/>
           </a:p>
           <a:p>
             <a:pPr marL="742950" lvl="1" indent="-285750" algn="l" rtl="0">
@@ -27001,7 +27654,7 @@
               <a:buChar char="■"/>
             </a:pPr>
             <a:r>
-              <a:rPr lang="en-US" sz="2200" b="0" i="0" u="none">
+              <a:rPr lang="en-US" sz="2200" b="0" i="0" u="none" dirty="0">
                 <a:solidFill>
                   <a:srgbClr val="800000"/>
                 </a:solidFill>
@@ -27012,7 +27665,7 @@
               </a:rPr>
               <a:t>The process of storing the join of higher normal form relations as a base relation—which is in a lower normal form    </a:t>
             </a:r>
-            <a:endParaRPr/>
+            <a:endParaRPr dirty="0"/>
           </a:p>
         </p:txBody>
       </p:sp>
@@ -27233,7 +27886,7 @@
               <a:buChar char="■"/>
             </a:pPr>
             <a:r>
-              <a:rPr lang="en-US" sz="2800" b="0" i="0" u="none">
+              <a:rPr lang="en-US" sz="2800" b="0" i="0" u="none" dirty="0">
                 <a:solidFill>
                   <a:schemeClr val="dk2"/>
                 </a:solidFill>
@@ -27245,7 +27898,7 @@
               <a:t>A </a:t>
             </a:r>
             <a:r>
-              <a:rPr lang="en-US" sz="2800" b="1" i="0" u="none">
+              <a:rPr lang="en-US" sz="2800" b="1" i="0" u="none" dirty="0">
                 <a:solidFill>
                   <a:schemeClr val="dk2"/>
                 </a:solidFill>
@@ -27257,7 +27910,7 @@
               <a:t>key</a:t>
             </a:r>
             <a:r>
-              <a:rPr lang="en-US" sz="2800" b="0" i="0" u="none">
+              <a:rPr lang="en-US" sz="2800" b="0" i="0" u="none" dirty="0">
                 <a:solidFill>
                   <a:schemeClr val="dk2"/>
                 </a:solidFill>
@@ -27269,7 +27922,7 @@
               <a:t> of a relation schema R = {A1, A2, ...., An} is a set of attributes S </a:t>
             </a:r>
             <a:r>
-              <a:rPr lang="en-US" sz="2800" b="0" i="1" u="none">
+              <a:rPr lang="en-US" sz="2800" b="0" i="1" u="none" dirty="0">
                 <a:solidFill>
                   <a:schemeClr val="dk2"/>
                 </a:solidFill>
@@ -27281,7 +27934,7 @@
               <a:t>subset-of</a:t>
             </a:r>
             <a:r>
-              <a:rPr lang="en-US" sz="2800" b="0" i="0" u="none">
+              <a:rPr lang="en-US" sz="2800" b="0" i="0" u="none" dirty="0">
                 <a:solidFill>
                   <a:schemeClr val="dk2"/>
                 </a:solidFill>
@@ -27292,7 +27945,7 @@
               </a:rPr>
               <a:t> R with the property that no two tuples t1 and t2 in any legal relation state r of R will have t1[S] = t2[S] </a:t>
             </a:r>
-            <a:endParaRPr/>
+            <a:endParaRPr dirty="0"/>
           </a:p>
           <a:p>
             <a:pPr marL="342900" lvl="0" indent="-342900" algn="l" rtl="0">
@@ -27309,7 +27962,7 @@
               <a:buNone/>
             </a:pPr>
             <a:r>
-              <a:rPr lang="en-US" sz="2800" b="0" i="0" u="none">
+              <a:rPr lang="en-US" sz="2800" b="0" i="0" u="none" dirty="0" err="1">
                 <a:solidFill>
                   <a:schemeClr val="dk2"/>
                 </a:solidFill>
@@ -27318,9 +27971,21 @@
                 <a:cs typeface="Arial"/>
                 <a:sym typeface="Arial"/>
               </a:rPr>
-              <a:t>Eg: {SSN},{SSN,ENAME}, {SSN,ENAME,SEX}</a:t>
-            </a:r>
-            <a:endParaRPr/>
+              <a:t>Eg</a:t>
+            </a:r>
+            <a:r>
+              <a:rPr lang="en-US" sz="2800" b="0" i="0" u="none" dirty="0">
+                <a:solidFill>
+                  <a:schemeClr val="dk2"/>
+                </a:solidFill>
+                <a:latin typeface="Arial"/>
+                <a:ea typeface="Arial"/>
+                <a:cs typeface="Arial"/>
+                <a:sym typeface="Arial"/>
+              </a:rPr>
+              <a:t>: {SSN},{SSN,ENAME}, {SSN,ENAME,SEX}</a:t>
+            </a:r>
+            <a:endParaRPr dirty="0"/>
           </a:p>
           <a:p>
             <a:pPr marL="342900" lvl="0" indent="-236220" algn="l" rtl="0">
@@ -27340,7 +28005,7 @@
               <a:buFont typeface="Noto Sans Symbols"/>
               <a:buNone/>
             </a:pPr>
-            <a:endParaRPr sz="2800" b="0" i="0" u="none">
+            <a:endParaRPr sz="2800" b="0" i="0" u="none" dirty="0">
               <a:solidFill>
                 <a:schemeClr val="dk2"/>
               </a:solidFill>
@@ -27369,10 +28034,13 @@
               <a:buChar char="■"/>
             </a:pPr>
             <a:r>
-              <a:rPr lang="en-US" sz="2800" b="0" i="0" u="none">
+              <a:rPr lang="en-US" sz="2800" b="0" i="0" u="none" dirty="0">
                 <a:solidFill>
                   <a:schemeClr val="dk2"/>
                 </a:solidFill>
+                <a:highlight>
+                  <a:srgbClr val="FFFF00"/>
+                </a:highlight>
                 <a:latin typeface="Arial"/>
                 <a:ea typeface="Arial"/>
                 <a:cs typeface="Arial"/>
@@ -27381,10 +28049,13 @@
               <a:t>A </a:t>
             </a:r>
             <a:r>
-              <a:rPr lang="en-US" sz="2800" b="1" i="0" u="none">
+              <a:rPr lang="en-US" sz="2800" b="1" i="0" u="none" dirty="0">
                 <a:solidFill>
                   <a:schemeClr val="dk2"/>
                 </a:solidFill>
+                <a:highlight>
+                  <a:srgbClr val="FFFF00"/>
+                </a:highlight>
                 <a:latin typeface="Arial"/>
                 <a:ea typeface="Arial"/>
                 <a:cs typeface="Arial"/>
@@ -27393,10 +28064,13 @@
               <a:t>key</a:t>
             </a:r>
             <a:r>
-              <a:rPr lang="en-US" sz="2800" b="0" i="0" u="none">
+              <a:rPr lang="en-US" sz="2800" b="0" i="0" u="none" dirty="0">
                 <a:solidFill>
                   <a:schemeClr val="dk2"/>
                 </a:solidFill>
+                <a:highlight>
+                  <a:srgbClr val="FFFF00"/>
+                </a:highlight>
                 <a:latin typeface="Arial"/>
                 <a:ea typeface="Arial"/>
                 <a:cs typeface="Arial"/>
@@ -27405,10 +28079,13 @@
               <a:t> K is a </a:t>
             </a:r>
             <a:r>
-              <a:rPr lang="en-US" sz="2800" b="1" i="0" u="none">
+              <a:rPr lang="en-US" sz="2800" b="1" i="0" u="none" dirty="0" err="1">
                 <a:solidFill>
                   <a:schemeClr val="dk2"/>
                 </a:solidFill>
+                <a:highlight>
+                  <a:srgbClr val="FFFF00"/>
+                </a:highlight>
                 <a:latin typeface="Arial"/>
                 <a:ea typeface="Arial"/>
                 <a:cs typeface="Arial"/>
@@ -27417,10 +28094,13 @@
               <a:t>superkey</a:t>
             </a:r>
             <a:r>
-              <a:rPr lang="en-US" sz="2800" b="0" i="0" u="none">
+              <a:rPr lang="en-US" sz="2800" b="0" i="0" u="none" dirty="0">
                 <a:solidFill>
                   <a:schemeClr val="dk2"/>
                 </a:solidFill>
+                <a:highlight>
+                  <a:srgbClr val="FFFF00"/>
+                </a:highlight>
                 <a:latin typeface="Arial"/>
                 <a:ea typeface="Arial"/>
                 <a:cs typeface="Arial"/>
@@ -27429,10 +28109,13 @@
               <a:t> with the </a:t>
             </a:r>
             <a:r>
-              <a:rPr lang="en-US" sz="2800" b="0" i="1" u="none">
+              <a:rPr lang="en-US" sz="2800" b="0" i="1" u="none" dirty="0">
                 <a:solidFill>
                   <a:schemeClr val="dk2"/>
                 </a:solidFill>
+                <a:highlight>
+                  <a:srgbClr val="FFFF00"/>
+                </a:highlight>
                 <a:latin typeface="Arial"/>
                 <a:ea typeface="Arial"/>
                 <a:cs typeface="Arial"/>
@@ -27441,18 +28124,55 @@
               <a:t>additional property</a:t>
             </a:r>
             <a:r>
-              <a:rPr lang="en-US" sz="2800" b="0" i="0" u="none">
+              <a:rPr lang="en-US" sz="2800" b="0" i="0" u="none" dirty="0">
                 <a:solidFill>
                   <a:schemeClr val="dk2"/>
                 </a:solidFill>
+                <a:highlight>
+                  <a:srgbClr val="FFFF00"/>
+                </a:highlight>
                 <a:latin typeface="Arial"/>
                 <a:ea typeface="Arial"/>
                 <a:cs typeface="Arial"/>
                 <a:sym typeface="Arial"/>
               </a:rPr>
-              <a:t> that removal of any attribute from K will cause K not to be a superkey any more. </a:t>
-            </a:r>
-            <a:endParaRPr/>
+              <a:t> that removal of any attribute from K will cause K not to be a </a:t>
+            </a:r>
+            <a:r>
+              <a:rPr lang="en-US" sz="2800" b="0" i="0" u="none" dirty="0" err="1">
+                <a:solidFill>
+                  <a:schemeClr val="dk2"/>
+                </a:solidFill>
+                <a:highlight>
+                  <a:srgbClr val="FFFF00"/>
+                </a:highlight>
+                <a:latin typeface="Arial"/>
+                <a:ea typeface="Arial"/>
+                <a:cs typeface="Arial"/>
+                <a:sym typeface="Arial"/>
+              </a:rPr>
+              <a:t>superkey</a:t>
+            </a:r>
+            <a:r>
+              <a:rPr lang="en-US" sz="2800" b="0" i="0" u="none" dirty="0">
+                <a:solidFill>
+                  <a:schemeClr val="dk2"/>
+                </a:solidFill>
+                <a:highlight>
+                  <a:srgbClr val="FFFF00"/>
+                </a:highlight>
+                <a:latin typeface="Arial"/>
+                <a:ea typeface="Arial"/>
+                <a:cs typeface="Arial"/>
+                <a:sym typeface="Arial"/>
+              </a:rPr>
+              <a:t> any more. </a:t>
+            </a:r>
+            <a:endParaRPr dirty="0">
+              <a:highlight>
+                <a:srgbClr val="FFFF00"/>
+              </a:highlight>
+            </a:endParaRPr>
           </a:p>
           <a:p>
             <a:pPr marL="342900" lvl="0" indent="-342900" algn="l" rtl="0">
@@ -27469,7 +28189,7 @@
               <a:buNone/>
             </a:pPr>
             <a:r>
-              <a:rPr lang="en-US" sz="2800" b="0" i="0" u="none">
+              <a:rPr lang="en-US" sz="2800" b="0" i="0" u="none" dirty="0" err="1">
                 <a:solidFill>
                   <a:schemeClr val="dk2"/>
                 </a:solidFill>
@@ -27478,9 +28198,21 @@
                 <a:cs typeface="Arial"/>
                 <a:sym typeface="Arial"/>
               </a:rPr>
-              <a:t>Eg:{SSN,ENAME}, {SSN,ENAME,SEX}</a:t>
-            </a:r>
-            <a:endParaRPr/>
+              <a:t>Eg</a:t>
+            </a:r>
+            <a:r>
+              <a:rPr lang="en-US" sz="2800" b="0" i="0" u="none" dirty="0">
+                <a:solidFill>
+                  <a:schemeClr val="dk2"/>
+                </a:solidFill>
+                <a:latin typeface="Arial"/>
+                <a:ea typeface="Arial"/>
+                <a:cs typeface="Arial"/>
+                <a:sym typeface="Arial"/>
+              </a:rPr>
+              <a:t>:{SSN,ENAME}, {SSN,ENAME,SEX}</a:t>
+            </a:r>
+            <a:endParaRPr dirty="0"/>
           </a:p>
           <a:p>
             <a:pPr marL="342900" lvl="0" indent="-236220" algn="l" rtl="0">
@@ -27496,7 +28228,7 @@
               <a:buSzPts val="1680"/>
               <a:buNone/>
             </a:pPr>
-            <a:endParaRPr sz="2800" b="0" i="0" u="none">
+            <a:endParaRPr sz="2800" b="0" i="0" u="none" dirty="0">
               <a:solidFill>
                 <a:schemeClr val="dk2"/>
               </a:solidFill>
@@ -27725,10 +28457,13 @@
               <a:buChar char="■"/>
             </a:pPr>
             <a:r>
-              <a:rPr lang="en-US" sz="2800" b="0" i="0" u="none">
+              <a:rPr lang="en-US" sz="2800" b="0" i="0" u="none" dirty="0">
                 <a:solidFill>
                   <a:schemeClr val="dk2"/>
                 </a:solidFill>
+                <a:highlight>
+                  <a:srgbClr val="FFFF00"/>
+                </a:highlight>
                 <a:latin typeface="Arial"/>
                 <a:ea typeface="Arial"/>
                 <a:cs typeface="Arial"/>
@@ -27737,10 +28472,13 @@
               <a:t>If a relation schema has more than one key, each is called a </a:t>
             </a:r>
             <a:r>
-              <a:rPr lang="en-US" sz="2800" b="1" i="0" u="none">
+              <a:rPr lang="en-US" sz="2800" b="1" i="0" u="none" dirty="0">
                 <a:solidFill>
                   <a:schemeClr val="dk2"/>
                 </a:solidFill>
+                <a:highlight>
+                  <a:srgbClr val="FFFF00"/>
+                </a:highlight>
                 <a:latin typeface="Arial"/>
                 <a:ea typeface="Arial"/>
                 <a:cs typeface="Arial"/>
@@ -27749,10 +28487,13 @@
               <a:t>candidate</a:t>
             </a:r>
             <a:r>
-              <a:rPr lang="en-US" sz="2800" b="0" i="0" u="none">
+              <a:rPr lang="en-US" sz="2800" b="0" i="0" u="none" dirty="0">
                 <a:solidFill>
                   <a:schemeClr val="dk2"/>
                 </a:solidFill>
+                <a:highlight>
+                  <a:srgbClr val="FFFF00"/>
+                </a:highlight>
                 <a:latin typeface="Arial"/>
                 <a:ea typeface="Arial"/>
                 <a:cs typeface="Arial"/>
@@ -27760,7 +28501,11 @@
               </a:rPr>
               <a:t> key.</a:t>
             </a:r>
-            <a:endParaRPr/>
+            <a:endParaRPr dirty="0">
+              <a:highlight>
+                <a:srgbClr val="FFFF00"/>
+              </a:highlight>
+            </a:endParaRPr>
           </a:p>
           <a:p>
             <a:pPr marL="742950" lvl="1" indent="-285750" algn="l" rtl="0">
@@ -27781,10 +28526,13 @@
               <a:buChar char="■"/>
             </a:pPr>
             <a:r>
-              <a:rPr lang="en-US" sz="2600" b="0" i="0" u="none">
+              <a:rPr lang="en-US" sz="2600" b="0" i="0" u="none" dirty="0">
                 <a:solidFill>
                   <a:srgbClr val="800000"/>
                 </a:solidFill>
+                <a:highlight>
+                  <a:srgbClr val="FFFF00"/>
+                </a:highlight>
                 <a:latin typeface="Arial"/>
                 <a:ea typeface="Arial"/>
                 <a:cs typeface="Arial"/>
@@ -27793,10 +28541,13 @@
               <a:t>One of the candidate keys is </a:t>
             </a:r>
             <a:r>
-              <a:rPr lang="en-US" sz="2600" b="0" i="1" u="none">
+              <a:rPr lang="en-US" sz="2600" b="0" i="1" u="none" dirty="0">
                 <a:solidFill>
                   <a:srgbClr val="800000"/>
                 </a:solidFill>
+                <a:highlight>
+                  <a:srgbClr val="FFFF00"/>
+                </a:highlight>
                 <a:latin typeface="Arial"/>
                 <a:ea typeface="Arial"/>
                 <a:cs typeface="Arial"/>
@@ -27805,10 +28556,13 @@
               <a:t>arbitrarily</a:t>
             </a:r>
             <a:r>
-              <a:rPr lang="en-US" sz="2600" b="0" i="0" u="none">
+              <a:rPr lang="en-US" sz="2600" b="0" i="0" u="none" dirty="0">
                 <a:solidFill>
                   <a:srgbClr val="800000"/>
                 </a:solidFill>
+                <a:highlight>
+                  <a:srgbClr val="FFFF00"/>
+                </a:highlight>
                 <a:latin typeface="Arial"/>
                 <a:ea typeface="Arial"/>
                 <a:cs typeface="Arial"/>
@@ -27817,10 +28571,13 @@
               <a:t> designated to be the </a:t>
             </a:r>
             <a:r>
-              <a:rPr lang="en-US" sz="2600" b="1" i="0" u="none">
+              <a:rPr lang="en-US" sz="2600" b="1" i="0" u="none" dirty="0">
                 <a:solidFill>
                   <a:srgbClr val="800000"/>
                 </a:solidFill>
+                <a:highlight>
+                  <a:srgbClr val="FFFF00"/>
+                </a:highlight>
                 <a:latin typeface="Arial"/>
                 <a:ea typeface="Arial"/>
                 <a:cs typeface="Arial"/>
@@ -27829,10 +28586,13 @@
               <a:t>primary key</a:t>
             </a:r>
             <a:r>
-              <a:rPr lang="en-US" sz="2600" b="0" i="0" u="none">
+              <a:rPr lang="en-US" sz="2600" b="0" i="0" u="none" dirty="0">
                 <a:solidFill>
                   <a:srgbClr val="800000"/>
                 </a:solidFill>
+                <a:highlight>
+                  <a:srgbClr val="FFFF00"/>
+                </a:highlight>
                 <a:latin typeface="Arial"/>
                 <a:ea typeface="Arial"/>
                 <a:cs typeface="Arial"/>
@@ -27841,10 +28601,13 @@
               <a:t>, and the others are called </a:t>
             </a:r>
             <a:r>
-              <a:rPr lang="en-US" sz="2600" b="1" i="0" u="none">
+              <a:rPr lang="en-US" sz="2600" b="1" i="0" u="none" dirty="0">
                 <a:solidFill>
                   <a:srgbClr val="800000"/>
                 </a:solidFill>
+                <a:highlight>
+                  <a:srgbClr val="FFFF00"/>
+                </a:highlight>
                 <a:latin typeface="Arial"/>
                 <a:ea typeface="Arial"/>
                 <a:cs typeface="Arial"/>
@@ -27853,10 +28616,13 @@
               <a:t>secondary keys</a:t>
             </a:r>
             <a:r>
-              <a:rPr lang="en-US" sz="2600" b="0" i="0" u="none">
+              <a:rPr lang="en-US" sz="2600" b="0" i="0" u="none" dirty="0">
                 <a:solidFill>
                   <a:srgbClr val="800000"/>
                 </a:solidFill>
+                <a:highlight>
+                  <a:srgbClr val="FFFF00"/>
+                </a:highlight>
                 <a:latin typeface="Arial"/>
                 <a:ea typeface="Arial"/>
                 <a:cs typeface="Arial"/>
@@ -27864,7 +28630,11 @@
               </a:rPr>
               <a:t>.</a:t>
             </a:r>
-            <a:endParaRPr/>
+            <a:endParaRPr dirty="0">
+              <a:highlight>
+                <a:srgbClr val="FFFF00"/>
+              </a:highlight>
+            </a:endParaRPr>
           </a:p>
           <a:p>
             <a:pPr marL="742950" lvl="1" indent="-285750" algn="l" rtl="0">
@@ -27881,7 +28651,7 @@
               <a:buNone/>
             </a:pPr>
             <a:r>
-              <a:rPr lang="en-US" sz="2600" b="0" i="0" u="none">
+              <a:rPr lang="en-US" sz="2600" b="0" i="0" u="none" dirty="0" err="1">
                 <a:solidFill>
                   <a:srgbClr val="800000"/>
                 </a:solidFill>
@@ -27890,9 +28660,21 @@
                 <a:cs typeface="Arial"/>
                 <a:sym typeface="Arial"/>
               </a:rPr>
-              <a:t>Eg: PRIMARY KEY = {SSN},  Secondary Key ={ESSN}, </a:t>
-            </a:r>
-            <a:endParaRPr/>
+              <a:t>Eg</a:t>
+            </a:r>
+            <a:r>
+              <a:rPr lang="en-US" sz="2600" b="0" i="0" u="none" dirty="0">
+                <a:solidFill>
+                  <a:srgbClr val="800000"/>
+                </a:solidFill>
+                <a:latin typeface="Arial"/>
+                <a:ea typeface="Arial"/>
+                <a:cs typeface="Arial"/>
+                <a:sym typeface="Arial"/>
+              </a:rPr>
+              <a:t>: PRIMARY KEY = {SSN},  Secondary Key ={ESSN}, </a:t>
+            </a:r>
+            <a:endParaRPr dirty="0"/>
           </a:p>
           <a:p>
             <a:pPr marL="342900" lvl="0" indent="-342900" algn="l" rtl="0">
@@ -27913,10 +28695,13 @@
               <a:buChar char="■"/>
             </a:pPr>
             <a:r>
-              <a:rPr lang="en-US" sz="2800" b="0" i="0" u="none">
+              <a:rPr lang="en-US" sz="2800" b="0" i="0" u="none" dirty="0">
                 <a:solidFill>
                   <a:schemeClr val="dk2"/>
                 </a:solidFill>
+                <a:highlight>
+                  <a:srgbClr val="FFFF00"/>
+                </a:highlight>
                 <a:latin typeface="Arial"/>
                 <a:ea typeface="Arial"/>
                 <a:cs typeface="Arial"/>
@@ -27925,10 +28710,13 @@
               <a:t>A </a:t>
             </a:r>
             <a:r>
-              <a:rPr lang="en-US" sz="2800" b="1" i="0" u="none">
+              <a:rPr lang="en-US" sz="2800" b="1" i="0" u="none" dirty="0">
                 <a:solidFill>
                   <a:schemeClr val="dk2"/>
                 </a:solidFill>
+                <a:highlight>
+                  <a:srgbClr val="FFFF00"/>
+                </a:highlight>
                 <a:latin typeface="Arial"/>
                 <a:ea typeface="Arial"/>
                 <a:cs typeface="Arial"/>
@@ -27937,10 +28725,13 @@
               <a:t>Prime attribute</a:t>
             </a:r>
             <a:r>
-              <a:rPr lang="en-US" sz="2800" b="0" i="0" u="none">
+              <a:rPr lang="en-US" sz="2800" b="0" i="0" u="none" dirty="0">
                 <a:solidFill>
                   <a:schemeClr val="dk2"/>
                 </a:solidFill>
+                <a:highlight>
+                  <a:srgbClr val="FFFF00"/>
+                </a:highlight>
                 <a:latin typeface="Arial"/>
                 <a:ea typeface="Arial"/>
                 <a:cs typeface="Arial"/>
@@ -27949,10 +28740,13 @@
               <a:t> must be a member of </a:t>
             </a:r>
             <a:r>
-              <a:rPr lang="en-US" sz="2800" b="0" i="1" u="none">
+              <a:rPr lang="en-US" sz="2800" b="0" i="1" u="none" dirty="0">
                 <a:solidFill>
                   <a:schemeClr val="dk2"/>
                 </a:solidFill>
+                <a:highlight>
+                  <a:srgbClr val="FFFF00"/>
+                </a:highlight>
                 <a:latin typeface="Arial"/>
                 <a:ea typeface="Arial"/>
                 <a:cs typeface="Arial"/>
@@ -27961,10 +28755,13 @@
               <a:t>some</a:t>
             </a:r>
             <a:r>
-              <a:rPr lang="en-US" sz="2800" b="0" i="0" u="none">
+              <a:rPr lang="en-US" sz="2800" b="0" i="0" u="none" dirty="0">
                 <a:solidFill>
                   <a:schemeClr val="dk2"/>
                 </a:solidFill>
+                <a:highlight>
+                  <a:srgbClr val="FFFF00"/>
+                </a:highlight>
                 <a:latin typeface="Arial"/>
                 <a:ea typeface="Arial"/>
                 <a:cs typeface="Arial"/>
@@ -27972,7 +28769,11 @@
               </a:rPr>
               <a:t> candidate key </a:t>
             </a:r>
-            <a:endParaRPr/>
+            <a:endParaRPr dirty="0">
+              <a:highlight>
+                <a:srgbClr val="FFFF00"/>
+              </a:highlight>
+            </a:endParaRPr>
           </a:p>
           <a:p>
             <a:pPr marL="342900" lvl="0" indent="-342900" algn="l" rtl="0">
@@ -27989,7 +28790,7 @@
               <a:buNone/>
             </a:pPr>
             <a:r>
-              <a:rPr lang="en-US" sz="2800" b="0" i="0" u="none">
+              <a:rPr lang="en-US" sz="2800" b="0" i="0" u="none" dirty="0">
                 <a:solidFill>
                   <a:schemeClr val="dk2"/>
                 </a:solidFill>
@@ -27998,9 +28799,33 @@
                 <a:cs typeface="Arial"/>
                 <a:sym typeface="Arial"/>
               </a:rPr>
-              <a:t>     Eg: SSN, PNO of  Works-on {SSN,PNO} </a:t>
-            </a:r>
-            <a:endParaRPr/>
+              <a:t>     </a:t>
+            </a:r>
+            <a:r>
+              <a:rPr lang="en-US" sz="2800" b="0" i="0" u="none" dirty="0" err="1">
+                <a:solidFill>
+                  <a:schemeClr val="dk2"/>
+                </a:solidFill>
+                <a:latin typeface="Arial"/>
+                <a:ea typeface="Arial"/>
+                <a:cs typeface="Arial"/>
+                <a:sym typeface="Arial"/>
+              </a:rPr>
+              <a:t>Eg</a:t>
+            </a:r>
+            <a:r>
+              <a:rPr lang="en-US" sz="2800" b="0" i="0" u="none" dirty="0">
+                <a:solidFill>
+                  <a:schemeClr val="dk2"/>
+                </a:solidFill>
+                <a:latin typeface="Arial"/>
+                <a:ea typeface="Arial"/>
+                <a:cs typeface="Arial"/>
+                <a:sym typeface="Arial"/>
+              </a:rPr>
+              <a:t>: SSN, PNO of  Works-on {SSN,PNO} </a:t>
+            </a:r>
+            <a:endParaRPr dirty="0"/>
           </a:p>
           <a:p>
             <a:pPr marL="342900" lvl="0" indent="-342900" algn="l" rtl="0">
@@ -28021,10 +28846,13 @@
               <a:buChar char="■"/>
             </a:pPr>
             <a:r>
-              <a:rPr lang="en-US" sz="2800" b="0" i="0" u="none">
+              <a:rPr lang="en-US" sz="2800" b="0" i="0" u="none" dirty="0">
                 <a:solidFill>
                   <a:schemeClr val="dk2"/>
                 </a:solidFill>
+                <a:highlight>
+                  <a:srgbClr val="FFFF00"/>
+                </a:highlight>
                 <a:latin typeface="Arial"/>
                 <a:ea typeface="Arial"/>
                 <a:cs typeface="Arial"/>
@@ -28033,10 +28861,13 @@
               <a:t>A </a:t>
             </a:r>
             <a:r>
-              <a:rPr lang="en-US" sz="2800" b="1" i="0" u="none">
+              <a:rPr lang="en-US" sz="2800" b="1" i="0" u="none" dirty="0">
                 <a:solidFill>
                   <a:schemeClr val="dk2"/>
                 </a:solidFill>
+                <a:highlight>
+                  <a:srgbClr val="FFFF00"/>
+                </a:highlight>
                 <a:latin typeface="Arial"/>
                 <a:ea typeface="Arial"/>
                 <a:cs typeface="Arial"/>
@@ -28045,10 +28876,13 @@
               <a:t>Nonprime attribute</a:t>
             </a:r>
             <a:r>
-              <a:rPr lang="en-US" sz="2800" b="0" i="0" u="none">
+              <a:rPr lang="en-US" sz="2800" b="0" i="0" u="none" dirty="0">
                 <a:solidFill>
                   <a:schemeClr val="dk2"/>
                 </a:solidFill>
+                <a:highlight>
+                  <a:srgbClr val="FFFF00"/>
+                </a:highlight>
                 <a:latin typeface="Arial"/>
                 <a:ea typeface="Arial"/>
                 <a:cs typeface="Arial"/>
@@ -28056,7 +28890,11 @@
               </a:rPr>
               <a:t> is not a prime attribute—that is, it is not a member of any candidate key. </a:t>
             </a:r>
-            <a:endParaRPr/>
+            <a:endParaRPr dirty="0">
+              <a:highlight>
+                <a:srgbClr val="FFFF00"/>
+              </a:highlight>
+            </a:endParaRPr>
           </a:p>
         </p:txBody>
       </p:sp>
